--- a/GAGA_deck.pptx
+++ b/GAGA_deck.pptx
@@ -4,6 +4,9 @@
   <p:sldMasterIdLst>
     <p:sldMasterId id="2147483648" r:id="rId1"/>
   </p:sldMasterIdLst>
+  <p:notesMasterIdLst>
+    <p:notesMasterId r:id="rId9"/>
+  </p:notesMasterIdLst>
   <p:sldIdLst>
     <p:sldId id="256" r:id="rId2"/>
     <p:sldId id="257" r:id="rId3"/>
@@ -13,10 +16,7 @@
     <p:sldId id="261" r:id="rId7"/>
     <p:sldId id="262" r:id="rId8"/>
   </p:sldIdLst>
-  <p:notesMasterIdLst>
-    <p:notesMasterId r:id="rId9"/>
-  </p:notesMasterIdLst>
-  <p:sldSz cx="9144000" cy="5143500"/>
+  <p:sldSz cx="9144000" cy="5143500" type="screen16x9"/>
   <p:notesSz cx="5143500" cy="9144000"/>
   <p:defaultTextStyle>
     <a:lvl1pPr marL="0" algn="l" defTabSz="914400" rtl="0" eaLnBrk="1" latinLnBrk="0" hangingPunct="1">
@@ -110,6 +110,11 @@
       </a:defRPr>
     </a:lvl9pPr>
   </p:defaultTextStyle>
+  <p:extLst>
+    <p:ext uri="{EFAFB233-063F-42B5-8137-9DF3F51BA10A}">
+      <p15:sldGuideLst xmlns:p15="http://schemas.microsoft.com/office/powerpoint/2012/main"/>
+    </p:ext>
+  </p:extLst>
 </p:presentation>
 </file>
 
@@ -135,234 +140,10 @@
           <a:chExt cx="0" cy="0"/>
         </a:xfrm>
       </p:grpSpPr>
-      <p:sp>
-        <p:nvSpPr>
-          <p:cNvPr id="2" name="Header Placeholder 1"/>
-          <p:cNvSpPr>
-            <a:spLocks noGrp="1"/>
-          </p:cNvSpPr>
-          <p:nvPr>
-            <p:ph type="hdr" sz="quarter"/>
-          </p:nvPr>
-        </p:nvSpPr>
-        <p:spPr>
-          <a:xfrm>
-            <a:off x="0" y="0"/>
-            <a:ext cx="2971800" cy="458788"/>
-          </a:xfrm>
-          <a:prstGeom prst="rect">
-            <a:avLst/>
-          </a:prstGeom>
-        </p:spPr>
-        <p:txBody>
-          <a:bodyPr vert="horz" lIns="91440" tIns="45720" rIns="91440" bIns="45720" rtlCol="0"/>
-          <a:lstStyle>
-            <a:lvl1pPr algn="l">
-              <a:defRPr sz="1200"/>
-            </a:lvl1pPr>
-          </a:lstStyle>
-          <a:p>
-            <a:endParaRPr lang="en-US"/>
-          </a:p>
-        </p:txBody>
-      </p:sp>
-      <p:sp>
-        <p:nvSpPr>
-          <p:cNvPr id="3" name="Date Placeholder 2"/>
-          <p:cNvSpPr>
-            <a:spLocks noGrp="1"/>
-          </p:cNvSpPr>
-          <p:nvPr>
-            <p:ph type="dt" idx="1"/>
-          </p:nvPr>
-        </p:nvSpPr>
-        <p:spPr>
-          <a:xfrm>
-            <a:off x="3884613" y="0"/>
-            <a:ext cx="2971800" cy="458788"/>
-          </a:xfrm>
-          <a:prstGeom prst="rect">
-            <a:avLst/>
-          </a:prstGeom>
-        </p:spPr>
-        <p:txBody>
-          <a:bodyPr vert="horz" lIns="91440" tIns="45720" rIns="91440" bIns="45720" rtlCol="0"/>
-          <a:lstStyle>
-            <a:lvl1pPr algn="r">
-              <a:defRPr sz="1200"/>
-            </a:lvl1pPr>
-          </a:lstStyle>
-          <a:p>
-            <a:fld id="{5282F153-3F37-0F45-9E97-73ACFA13230C}" type="datetimeFigureOut">
-              <a:rPr lang="en-US"/>
-              <a:t>7/23/19</a:t>
-            </a:fld>
-            <a:endParaRPr lang="en-US"/>
-          </a:p>
-        </p:txBody>
-      </p:sp>
-      <p:sp>
-        <p:nvSpPr>
-          <p:cNvPr id="4" name="Slide Image Placeholder 3"/>
-          <p:cNvSpPr>
-            <a:spLocks noGrp="1" noRot="1" noChangeAspect="1"/>
-          </p:cNvSpPr>
-          <p:nvPr>
-            <p:ph type="sldImg" idx="2"/>
-          </p:nvPr>
-        </p:nvSpPr>
-        <p:spPr>
-          <a:xfrm>
-            <a:off x="685800" y="1143000"/>
-            <a:ext cx="5486400" cy="3086100"/>
-          </a:xfrm>
-          <a:prstGeom prst="rect">
-            <a:avLst/>
-          </a:prstGeom>
-          <a:noFill/>
-          <a:ln w="12700">
-            <a:solidFill>
-              <a:prstClr val="black"/>
-            </a:solidFill>
-          </a:ln>
-        </p:spPr>
-        <p:txBody>
-          <a:bodyPr vert="horz" lIns="91440" tIns="45720" rIns="91440" bIns="45720" rtlCol="0" anchor="ctr"/>
-          <a:lstStyle/>
-          <a:p>
-            <a:endParaRPr lang="en-US"/>
-          </a:p>
-        </p:txBody>
-      </p:sp>
-      <p:sp>
-        <p:nvSpPr>
-          <p:cNvPr id="5" name="Notes Placeholder 4"/>
-          <p:cNvSpPr>
-            <a:spLocks noGrp="1"/>
-          </p:cNvSpPr>
-          <p:nvPr>
-            <p:ph type="body" sz="quarter" idx="3"/>
-          </p:nvPr>
-        </p:nvSpPr>
-        <p:spPr>
-          <a:xfrm>
-            <a:off x="685800" y="4400550"/>
-            <a:ext cx="5486400" cy="3600450"/>
-          </a:xfrm>
-          <a:prstGeom prst="rect">
-            <a:avLst/>
-          </a:prstGeom>
-        </p:spPr>
-        <p:txBody>
-          <a:bodyPr vert="horz" lIns="91440" tIns="45720" rIns="91440" bIns="45720" rtlCol="0"/>
-          <a:lstStyle/>
-          <a:p>
-            <a:pPr lvl="0"/>
-            <a:r>
-              <a:rPr lang="en-US"/>
-              <a:t>Click to edit Master text styles</a:t>
-            </a:r>
-          </a:p>
-          <a:p>
-            <a:pPr lvl="1"/>
-            <a:r>
-              <a:rPr lang="en-US"/>
-              <a:t>Second level</a:t>
-            </a:r>
-          </a:p>
-          <a:p>
-            <a:pPr lvl="2"/>
-            <a:r>
-              <a:rPr lang="en-US"/>
-              <a:t>Third level</a:t>
-            </a:r>
-          </a:p>
-          <a:p>
-            <a:pPr lvl="3"/>
-            <a:r>
-              <a:rPr lang="en-US"/>
-              <a:t>Fourth level</a:t>
-            </a:r>
-          </a:p>
-          <a:p>
-            <a:pPr lvl="4"/>
-            <a:r>
-              <a:rPr lang="en-US"/>
-              <a:t>Fifth level</a:t>
-            </a:r>
-          </a:p>
-        </p:txBody>
-      </p:sp>
-      <p:sp>
-        <p:nvSpPr>
-          <p:cNvPr id="6" name="Footer Placeholder 5"/>
-          <p:cNvSpPr>
-            <a:spLocks noGrp="1"/>
-          </p:cNvSpPr>
-          <p:nvPr>
-            <p:ph type="ftr" sz="quarter" idx="4"/>
-          </p:nvPr>
-        </p:nvSpPr>
-        <p:spPr>
-          <a:xfrm>
-            <a:off x="0" y="8685213"/>
-            <a:ext cx="2971800" cy="458787"/>
-          </a:xfrm>
-          <a:prstGeom prst="rect">
-            <a:avLst/>
-          </a:prstGeom>
-        </p:spPr>
-        <p:txBody>
-          <a:bodyPr vert="horz" lIns="91440" tIns="45720" rIns="91440" bIns="45720" rtlCol="0" anchor="b"/>
-          <a:lstStyle>
-            <a:lvl1pPr algn="l">
-              <a:defRPr sz="1200"/>
-            </a:lvl1pPr>
-          </a:lstStyle>
-          <a:p>
-            <a:endParaRPr lang="en-US"/>
-          </a:p>
-        </p:txBody>
-      </p:sp>
-      <p:sp>
-        <p:nvSpPr>
-          <p:cNvPr id="7" name="Slide Number Placeholder 6"/>
-          <p:cNvSpPr>
-            <a:spLocks noGrp="1"/>
-          </p:cNvSpPr>
-          <p:nvPr>
-            <p:ph type="sldNum" sz="quarter" idx="5"/>
-          </p:nvPr>
-        </p:nvSpPr>
-        <p:spPr>
-          <a:xfrm>
-            <a:off x="3884613" y="8685213"/>
-            <a:ext cx="2971800" cy="458787"/>
-          </a:xfrm>
-          <a:prstGeom prst="rect">
-            <a:avLst/>
-          </a:prstGeom>
-        </p:spPr>
-        <p:txBody>
-          <a:bodyPr vert="horz" lIns="91440" tIns="45720" rIns="91440" bIns="45720" rtlCol="0" anchor="b"/>
-          <a:lstStyle>
-            <a:lvl1pPr algn="r">
-              <a:defRPr sz="1200"/>
-            </a:lvl1pPr>
-          </a:lstStyle>
-          <a:p>
-            <a:fld id="{CE5E9CC1-C706-0F49-92D6-E571CC5EEA8F}" type="slidenum">
-              <a:rPr lang="en-US"/>
-              <a:t>‹#›</a:t>
-            </a:fld>
-            <a:endParaRPr lang="en-US"/>
-          </a:p>
-        </p:txBody>
-      </p:sp>
     </p:spTree>
     <p:extLst>
       <p:ext uri="{BB962C8B-B14F-4D97-AF65-F5344CB8AC3E}">
-        <p14:creationId xmlns:p14="http://schemas.microsoft.com/office/powerpoint/2010/main" val="1024086991"/>
+        <p14:creationId xmlns:p14="http://schemas.microsoft.com/office/powerpoint/2010/main" val="1658012604"/>
       </p:ext>
     </p:extLst>
   </p:cSld>
@@ -506,10 +287,6 @@
           <a:bodyPr/>
           <a:lstStyle/>
           <a:p>
-            <a:r>
-              <a:rPr lang="en-US" dirty="0"/>
-              <a:t/>
-            </a:r>
             <a:endParaRPr lang="en-US" dirty="0"/>
           </a:p>
         </p:txBody>
@@ -594,10 +371,6 @@
           <a:bodyPr/>
           <a:lstStyle/>
           <a:p>
-            <a:r>
-              <a:rPr lang="en-US" dirty="0"/>
-              <a:t/>
-            </a:r>
             <a:endParaRPr lang="en-US" dirty="0"/>
           </a:p>
         </p:txBody>
@@ -682,10 +455,6 @@
           <a:bodyPr/>
           <a:lstStyle/>
           <a:p>
-            <a:r>
-              <a:rPr lang="en-US" dirty="0"/>
-              <a:t/>
-            </a:r>
             <a:endParaRPr lang="en-US" dirty="0"/>
           </a:p>
         </p:txBody>
@@ -770,10 +539,6 @@
           <a:bodyPr/>
           <a:lstStyle/>
           <a:p>
-            <a:r>
-              <a:rPr lang="en-US" dirty="0"/>
-              <a:t/>
-            </a:r>
             <a:endParaRPr lang="en-US" dirty="0"/>
           </a:p>
         </p:txBody>
@@ -858,10 +623,6 @@
           <a:bodyPr/>
           <a:lstStyle/>
           <a:p>
-            <a:r>
-              <a:rPr lang="en-US" dirty="0"/>
-              <a:t/>
-            </a:r>
             <a:endParaRPr lang="en-US" dirty="0"/>
           </a:p>
         </p:txBody>
@@ -946,10 +707,6 @@
           <a:bodyPr/>
           <a:lstStyle/>
           <a:p>
-            <a:r>
-              <a:rPr lang="en-US" dirty="0"/>
-              <a:t/>
-            </a:r>
             <a:endParaRPr lang="en-US" dirty="0"/>
           </a:p>
         </p:txBody>
@@ -1034,10 +791,6 @@
           <a:bodyPr/>
           <a:lstStyle/>
           <a:p>
-            <a:r>
-              <a:rPr lang="en-US" dirty="0"/>
-              <a:t/>
-            </a:r>
             <a:endParaRPr lang="en-US" dirty="0"/>
           </a:p>
         </p:txBody>
@@ -1111,6 +864,11 @@
 <file path=ppt/slideMasters/slideMaster1.xml><?xml version="1.0" encoding="utf-8"?>
 <p:sldMaster xmlns:a="http://schemas.openxmlformats.org/drawingml/2006/main" xmlns:r="http://schemas.openxmlformats.org/officeDocument/2006/relationships" xmlns:p="http://schemas.openxmlformats.org/presentationml/2006/main">
   <p:cSld>
+    <p:bg>
+      <p:bgRef idx="1001">
+        <a:schemeClr val="bg1"/>
+      </p:bgRef>
+    </p:bg>
     <p:spTree>
       <p:nvGrpSpPr>
         <p:cNvPr id="1" name=""/>
@@ -1393,6 +1151,7 @@
         <a:solidFill>
           <a:srgbClr val="F3F2EE"/>
         </a:solidFill>
+        <a:effectLst/>
       </p:bgPr>
     </p:bg>
     <p:spTree>
@@ -1428,24 +1187,31 @@
           </a:solidFill>
           <a:ln/>
           <a:effectLst>
-            <a:outerShdw sx="100000" sy="100000" kx="0" ky="0" algn="bl" rotWithShape="0" blurRad="88900" dist="38100" dir="5400000">
+            <a:outerShdw blurRad="88900" dist="38100" dir="5400000" algn="bl" rotWithShape="0">
               <a:srgbClr val="000000">
                 <a:alpha val="12000"/>
               </a:srgbClr>
             </a:outerShdw>
           </a:effectLst>
         </p:spPr>
+        <p:txBody>
+          <a:bodyPr/>
+          <a:lstStyle/>
+          <a:p>
+            <a:endParaRPr lang="it-IT"/>
+          </a:p>
+        </p:txBody>
       </p:sp>
       <p:pic>
         <p:nvPicPr>
-          <p:cNvPr id="3" name="Image 0" descr="preencoded.png">    </p:cNvPr>
+          <p:cNvPr id="3" name="Image 0" descr="preencoded.png"/>
           <p:cNvPicPr>
             <a:picLocks noChangeAspect="1"/>
           </p:cNvPicPr>
           <p:nvPr/>
         </p:nvPicPr>
         <p:blipFill>
-          <a:blip r:embed="rId1"/>
+          <a:blip r:embed="rId3"/>
           <a:stretch>
             <a:fillRect/>
           </a:stretch>
@@ -1481,11 +1247,11 @@
           <a:bodyPr wrap="square" lIns="0" tIns="0" rIns="0" bIns="0" rtlCol="0" anchor="ctr"/>
           <a:lstStyle/>
           <a:p>
-            <a:pPr indent="0" marL="0">
-              <a:buNone/>
-            </a:pPr>
-            <a:r>
-              <a:rPr lang="en-US" sz="1150" b="1" spc="200" kern="0" dirty="0">
+            <a:pPr marL="0" indent="0">
+              <a:buNone/>
+            </a:pPr>
+            <a:r>
+              <a:rPr lang="en-US" sz="1150" b="1" kern="0" spc="200" dirty="0">
                 <a:solidFill>
                   <a:srgbClr val="6B7280"/>
                 </a:solidFill>
@@ -1520,7 +1286,7 @@
           <a:bodyPr wrap="square" lIns="0" tIns="0" rIns="0" bIns="0" rtlCol="0" anchor="ctr"/>
           <a:lstStyle/>
           <a:p>
-            <a:pPr indent="0" marL="0">
+            <a:pPr marL="0" indent="0">
               <a:lnSpc>
                 <a:spcPct val="100000"/>
               </a:lnSpc>
@@ -1540,7 +1306,7 @@
             <a:endParaRPr lang="en-US" sz="3600" dirty="0"/>
           </a:p>
           <a:p>
-            <a:pPr indent="0" marL="0">
+            <a:pPr marL="0" indent="0">
               <a:lnSpc>
                 <a:spcPct val="100000"/>
               </a:lnSpc>
@@ -1582,281 +1348,242 @@
           <a:bodyPr wrap="square" lIns="0" tIns="0" rIns="0" bIns="0" rtlCol="0" anchor="ctr"/>
           <a:lstStyle/>
           <a:p>
-            <a:pPr indent="0" marL="0">
-              <a:buNone/>
-            </a:pPr>
-            <a:r>
-              <a:rPr lang="en-US" sz="1450" dirty="0">
-                <a:solidFill>
-                  <a:srgbClr val="1C2B36"/>
+            <a:pPr marL="0" indent="0">
+              <a:buNone/>
+            </a:pPr>
+            <a:endParaRPr lang="en-US" sz="1450" dirty="0"/>
+          </a:p>
+        </p:txBody>
+      </p:sp>
+      <p:sp>
+        <p:nvSpPr>
+          <p:cNvPr id="7" name="Text 4"/>
+          <p:cNvSpPr/>
+          <p:nvPr/>
+        </p:nvSpPr>
+        <p:spPr>
+          <a:xfrm>
+            <a:off x="658368" y="3611880"/>
+            <a:ext cx="1371600" cy="292608"/>
+          </a:xfrm>
+          <a:prstGeom prst="rect">
+            <a:avLst/>
+          </a:prstGeom>
+          <a:noFill/>
+          <a:ln/>
+        </p:spPr>
+        <p:txBody>
+          <a:bodyPr wrap="square" lIns="0" tIns="0" rIns="0" bIns="0" rtlCol="0" anchor="ctr"/>
+          <a:lstStyle/>
+          <a:p>
+            <a:pPr marL="0" indent="0">
+              <a:buNone/>
+            </a:pPr>
+            <a:r>
+              <a:rPr lang="en-US" sz="1000" b="1" kern="0" spc="150" dirty="0">
+                <a:solidFill>
+                  <a:srgbClr val="2F6E80"/>
                 </a:solidFill>
                 <a:latin typeface="Calibri" pitchFamily="34" charset="0"/>
                 <a:ea typeface="Calibri" pitchFamily="34" charset="-122"/>
                 <a:cs typeface="Calibri" pitchFamily="34" charset="-120"/>
               </a:rPr>
-              <a:t>A study &amp; component ablation of </a:t>
-            </a:r>
-            <a:pPr indent="0" marL="0">
-              <a:buNone/>
-            </a:pPr>
-            <a:r>
-              <a:rPr lang="en-US" sz="1450" b="1" dirty="0">
-                <a:solidFill>
-                  <a:srgbClr val="C04A3B"/>
+              <a:t>AUTHORS</a:t>
+            </a:r>
+            <a:endParaRPr lang="en-US" sz="1000" dirty="0"/>
+          </a:p>
+        </p:txBody>
+      </p:sp>
+      <p:sp>
+        <p:nvSpPr>
+          <p:cNvPr id="8" name="Text 5"/>
+          <p:cNvSpPr/>
+          <p:nvPr/>
+        </p:nvSpPr>
+        <p:spPr>
+          <a:xfrm>
+            <a:off x="1874520" y="3611880"/>
+            <a:ext cx="3383280" cy="292608"/>
+          </a:xfrm>
+          <a:prstGeom prst="rect">
+            <a:avLst/>
+          </a:prstGeom>
+          <a:noFill/>
+          <a:ln/>
+        </p:spPr>
+        <p:txBody>
+          <a:bodyPr wrap="square" lIns="0" tIns="0" rIns="0" bIns="0" rtlCol="0" anchor="ctr"/>
+          <a:lstStyle/>
+          <a:p>
+            <a:pPr marL="0" indent="0">
+              <a:buNone/>
+            </a:pPr>
+            <a:r>
+              <a:rPr lang="en-US" sz="1150" dirty="0">
+                <a:solidFill>
+                  <a:srgbClr val="1C2B36"/>
                 </a:solidFill>
                 <a:latin typeface="Calibri" pitchFamily="34" charset="0"/>
                 <a:ea typeface="Calibri" pitchFamily="34" charset="-122"/>
                 <a:cs typeface="Calibri" pitchFamily="34" charset="-120"/>
               </a:rPr>
-              <a:t>GAGA</a:t>
-            </a:r>
-            <a:pPr indent="0" marL="0">
-              <a:buNone/>
-            </a:pPr>
-            <a:r>
-              <a:rPr lang="en-US" sz="1450" dirty="0">
-                <a:solidFill>
-                  <a:srgbClr val="6B7280"/>
+              <a:t>Alessandro Nese</a:t>
+            </a:r>
+            <a:endParaRPr lang="en-US" sz="1150" dirty="0"/>
+          </a:p>
+        </p:txBody>
+      </p:sp>
+      <p:sp>
+        <p:nvSpPr>
+          <p:cNvPr id="9" name="Text 6"/>
+          <p:cNvSpPr/>
+          <p:nvPr/>
+        </p:nvSpPr>
+        <p:spPr>
+          <a:xfrm>
+            <a:off x="658368" y="3995928"/>
+            <a:ext cx="1371600" cy="292608"/>
+          </a:xfrm>
+          <a:prstGeom prst="rect">
+            <a:avLst/>
+          </a:prstGeom>
+          <a:noFill/>
+          <a:ln/>
+        </p:spPr>
+        <p:txBody>
+          <a:bodyPr wrap="square" lIns="0" tIns="0" rIns="0" bIns="0" rtlCol="0" anchor="ctr"/>
+          <a:lstStyle/>
+          <a:p>
+            <a:pPr marL="0" indent="0">
+              <a:buNone/>
+            </a:pPr>
+            <a:r>
+              <a:rPr lang="en-US" sz="1000" b="1" kern="0" spc="150" dirty="0">
+                <a:solidFill>
+                  <a:srgbClr val="2F6E80"/>
                 </a:solidFill>
                 <a:latin typeface="Calibri" pitchFamily="34" charset="0"/>
                 <a:ea typeface="Calibri" pitchFamily="34" charset="-122"/>
                 <a:cs typeface="Calibri" pitchFamily="34" charset="-120"/>
               </a:rPr>
-              <a:t>  (Wang et al., WWW 2023)</a:t>
-            </a:r>
-            <a:endParaRPr lang="en-US" sz="1450" dirty="0"/>
-          </a:p>
-        </p:txBody>
-      </p:sp>
-      <p:sp>
-        <p:nvSpPr>
-          <p:cNvPr id="7" name="Text 4"/>
-          <p:cNvSpPr/>
-          <p:nvPr/>
-        </p:nvSpPr>
-        <p:spPr>
-          <a:xfrm>
-            <a:off x="658368" y="3611880"/>
-            <a:ext cx="1371600" cy="292608"/>
-          </a:xfrm>
-          <a:prstGeom prst="rect">
-            <a:avLst/>
-          </a:prstGeom>
-          <a:noFill/>
-          <a:ln/>
-        </p:spPr>
-        <p:txBody>
-          <a:bodyPr wrap="square" lIns="0" tIns="0" rIns="0" bIns="0" rtlCol="0" anchor="ctr"/>
-          <a:lstStyle/>
-          <a:p>
-            <a:pPr indent="0" marL="0">
-              <a:buNone/>
-            </a:pPr>
-            <a:r>
-              <a:rPr lang="en-US" sz="1000" b="1" spc="150" kern="0" dirty="0">
-                <a:solidFill>
-                  <a:srgbClr val="2F6E80"/>
+              <a:t>COURSE</a:t>
+            </a:r>
+            <a:endParaRPr lang="en-US" sz="1000" dirty="0"/>
+          </a:p>
+        </p:txBody>
+      </p:sp>
+      <p:sp>
+        <p:nvSpPr>
+          <p:cNvPr id="10" name="Text 7"/>
+          <p:cNvSpPr/>
+          <p:nvPr/>
+        </p:nvSpPr>
+        <p:spPr>
+          <a:xfrm>
+            <a:off x="1874520" y="3995928"/>
+            <a:ext cx="3383280" cy="292608"/>
+          </a:xfrm>
+          <a:prstGeom prst="rect">
+            <a:avLst/>
+          </a:prstGeom>
+          <a:noFill/>
+          <a:ln/>
+        </p:spPr>
+        <p:txBody>
+          <a:bodyPr wrap="square" lIns="0" tIns="0" rIns="0" bIns="0" rtlCol="0" anchor="ctr"/>
+          <a:lstStyle/>
+          <a:p>
+            <a:pPr marL="0" indent="0">
+              <a:buNone/>
+            </a:pPr>
+            <a:r>
+              <a:rPr lang="en-US" sz="1150" dirty="0">
+                <a:solidFill>
+                  <a:srgbClr val="1C2B36"/>
                 </a:solidFill>
                 <a:latin typeface="Calibri" pitchFamily="34" charset="0"/>
                 <a:ea typeface="Calibri" pitchFamily="34" charset="-122"/>
                 <a:cs typeface="Calibri" pitchFamily="34" charset="-120"/>
               </a:rPr>
-              <a:t>AUTHORS</a:t>
-            </a:r>
-            <a:endParaRPr lang="en-US" sz="1000" dirty="0"/>
-          </a:p>
-        </p:txBody>
-      </p:sp>
-      <p:sp>
-        <p:nvSpPr>
-          <p:cNvPr id="8" name="Text 5"/>
-          <p:cNvSpPr/>
-          <p:nvPr/>
-        </p:nvSpPr>
-        <p:spPr>
-          <a:xfrm>
-            <a:off x="1874520" y="3611880"/>
-            <a:ext cx="3383280" cy="292608"/>
-          </a:xfrm>
-          <a:prstGeom prst="rect">
-            <a:avLst/>
-          </a:prstGeom>
-          <a:noFill/>
-          <a:ln/>
-        </p:spPr>
-        <p:txBody>
-          <a:bodyPr wrap="square" lIns="0" tIns="0" rIns="0" bIns="0" rtlCol="0" anchor="ctr"/>
-          <a:lstStyle/>
-          <a:p>
-            <a:pPr indent="0" marL="0">
-              <a:buNone/>
-            </a:pPr>
-            <a:r>
-              <a:rPr lang="en-US" sz="1150" dirty="0">
-                <a:solidFill>
-                  <a:srgbClr val="1C2B36"/>
+              <a:t>Neural Network  ·  MSc Computer Science, Sapienza</a:t>
+            </a:r>
+            <a:endParaRPr lang="en-US" sz="1150" dirty="0"/>
+          </a:p>
+        </p:txBody>
+      </p:sp>
+      <p:sp>
+        <p:nvSpPr>
+          <p:cNvPr id="11" name="Text 8"/>
+          <p:cNvSpPr/>
+          <p:nvPr/>
+        </p:nvSpPr>
+        <p:spPr>
+          <a:xfrm>
+            <a:off x="658368" y="4379976"/>
+            <a:ext cx="1371600" cy="292608"/>
+          </a:xfrm>
+          <a:prstGeom prst="rect">
+            <a:avLst/>
+          </a:prstGeom>
+          <a:noFill/>
+          <a:ln/>
+        </p:spPr>
+        <p:txBody>
+          <a:bodyPr wrap="square" lIns="0" tIns="0" rIns="0" bIns="0" rtlCol="0" anchor="ctr"/>
+          <a:lstStyle/>
+          <a:p>
+            <a:pPr marL="0" indent="0">
+              <a:buNone/>
+            </a:pPr>
+            <a:r>
+              <a:rPr lang="en-US" sz="1000" b="1" kern="0" spc="150" dirty="0">
+                <a:solidFill>
+                  <a:srgbClr val="2F6E80"/>
                 </a:solidFill>
                 <a:latin typeface="Calibri" pitchFamily="34" charset="0"/>
                 <a:ea typeface="Calibri" pitchFamily="34" charset="-122"/>
                 <a:cs typeface="Calibri" pitchFamily="34" charset="-120"/>
               </a:rPr>
-              <a:t>[ Author name(s) ]</a:t>
-            </a:r>
-            <a:endParaRPr lang="en-US" sz="1150" dirty="0"/>
-          </a:p>
-        </p:txBody>
-      </p:sp>
-      <p:sp>
-        <p:nvSpPr>
-          <p:cNvPr id="9" name="Text 6"/>
-          <p:cNvSpPr/>
-          <p:nvPr/>
-        </p:nvSpPr>
-        <p:spPr>
-          <a:xfrm>
-            <a:off x="658368" y="3995928"/>
-            <a:ext cx="1371600" cy="292608"/>
-          </a:xfrm>
-          <a:prstGeom prst="rect">
-            <a:avLst/>
-          </a:prstGeom>
-          <a:noFill/>
-          <a:ln/>
-        </p:spPr>
-        <p:txBody>
-          <a:bodyPr wrap="square" lIns="0" tIns="0" rIns="0" bIns="0" rtlCol="0" anchor="ctr"/>
-          <a:lstStyle/>
-          <a:p>
-            <a:pPr indent="0" marL="0">
-              <a:buNone/>
-            </a:pPr>
-            <a:r>
-              <a:rPr lang="en-US" sz="1000" b="1" spc="150" kern="0" dirty="0">
-                <a:solidFill>
-                  <a:srgbClr val="2F6E80"/>
+              <a:t>EXAM DATE</a:t>
+            </a:r>
+            <a:endParaRPr lang="en-US" sz="1000" dirty="0"/>
+          </a:p>
+        </p:txBody>
+      </p:sp>
+      <p:sp>
+        <p:nvSpPr>
+          <p:cNvPr id="12" name="Text 9"/>
+          <p:cNvSpPr/>
+          <p:nvPr/>
+        </p:nvSpPr>
+        <p:spPr>
+          <a:xfrm>
+            <a:off x="1874520" y="4379976"/>
+            <a:ext cx="3383280" cy="292608"/>
+          </a:xfrm>
+          <a:prstGeom prst="rect">
+            <a:avLst/>
+          </a:prstGeom>
+          <a:noFill/>
+          <a:ln/>
+        </p:spPr>
+        <p:txBody>
+          <a:bodyPr wrap="square" lIns="0" tIns="0" rIns="0" bIns="0" rtlCol="0" anchor="ctr"/>
+          <a:lstStyle/>
+          <a:p>
+            <a:pPr marL="0" indent="0">
+              <a:buNone/>
+            </a:pPr>
+            <a:r>
+              <a:rPr lang="en-US" sz="1150" dirty="0">
+                <a:solidFill>
+                  <a:srgbClr val="1C2B36"/>
                 </a:solidFill>
                 <a:latin typeface="Calibri" pitchFamily="34" charset="0"/>
                 <a:ea typeface="Calibri" pitchFamily="34" charset="-122"/>
                 <a:cs typeface="Calibri" pitchFamily="34" charset="-120"/>
               </a:rPr>
-              <a:t>COURSE</a:t>
-            </a:r>
-            <a:endParaRPr lang="en-US" sz="1000" dirty="0"/>
-          </a:p>
-        </p:txBody>
-      </p:sp>
-      <p:sp>
-        <p:nvSpPr>
-          <p:cNvPr id="10" name="Text 7"/>
-          <p:cNvSpPr/>
-          <p:nvPr/>
-        </p:nvSpPr>
-        <p:spPr>
-          <a:xfrm>
-            <a:off x="1874520" y="3995928"/>
-            <a:ext cx="3383280" cy="292608"/>
-          </a:xfrm>
-          <a:prstGeom prst="rect">
-            <a:avLst/>
-          </a:prstGeom>
-          <a:noFill/>
-          <a:ln/>
-        </p:spPr>
-        <p:txBody>
-          <a:bodyPr wrap="square" lIns="0" tIns="0" rIns="0" bIns="0" rtlCol="0" anchor="ctr"/>
-          <a:lstStyle/>
-          <a:p>
-            <a:pPr indent="0" marL="0">
-              <a:buNone/>
-            </a:pPr>
-            <a:r>
-              <a:rPr lang="en-US" sz="1150" dirty="0">
-                <a:solidFill>
-                  <a:srgbClr val="1C2B36"/>
-                </a:solidFill>
-                <a:latin typeface="Calibri" pitchFamily="34" charset="0"/>
-                <a:ea typeface="Calibri" pitchFamily="34" charset="-122"/>
-                <a:cs typeface="Calibri" pitchFamily="34" charset="-120"/>
-              </a:rPr>
-              <a:t>[ Course name ]  ·  MSc Computer Science, Sapienza University of Rome</a:t>
-            </a:r>
-            <a:endParaRPr lang="en-US" sz="1150" dirty="0"/>
-          </a:p>
-        </p:txBody>
-      </p:sp>
-      <p:sp>
-        <p:nvSpPr>
-          <p:cNvPr id="11" name="Text 8"/>
-          <p:cNvSpPr/>
-          <p:nvPr/>
-        </p:nvSpPr>
-        <p:spPr>
-          <a:xfrm>
-            <a:off x="658368" y="4379976"/>
-            <a:ext cx="1371600" cy="292608"/>
-          </a:xfrm>
-          <a:prstGeom prst="rect">
-            <a:avLst/>
-          </a:prstGeom>
-          <a:noFill/>
-          <a:ln/>
-        </p:spPr>
-        <p:txBody>
-          <a:bodyPr wrap="square" lIns="0" tIns="0" rIns="0" bIns="0" rtlCol="0" anchor="ctr"/>
-          <a:lstStyle/>
-          <a:p>
-            <a:pPr indent="0" marL="0">
-              <a:buNone/>
-            </a:pPr>
-            <a:r>
-              <a:rPr lang="en-US" sz="1000" b="1" spc="150" kern="0" dirty="0">
-                <a:solidFill>
-                  <a:srgbClr val="2F6E80"/>
-                </a:solidFill>
-                <a:latin typeface="Calibri" pitchFamily="34" charset="0"/>
-                <a:ea typeface="Calibri" pitchFamily="34" charset="-122"/>
-                <a:cs typeface="Calibri" pitchFamily="34" charset="-120"/>
-              </a:rPr>
-              <a:t>EXAM DATE</a:t>
-            </a:r>
-            <a:endParaRPr lang="en-US" sz="1000" dirty="0"/>
-          </a:p>
-        </p:txBody>
-      </p:sp>
-      <p:sp>
-        <p:nvSpPr>
-          <p:cNvPr id="12" name="Text 9"/>
-          <p:cNvSpPr/>
-          <p:nvPr/>
-        </p:nvSpPr>
-        <p:spPr>
-          <a:xfrm>
-            <a:off x="1874520" y="4379976"/>
-            <a:ext cx="3383280" cy="292608"/>
-          </a:xfrm>
-          <a:prstGeom prst="rect">
-            <a:avLst/>
-          </a:prstGeom>
-          <a:noFill/>
-          <a:ln/>
-        </p:spPr>
-        <p:txBody>
-          <a:bodyPr wrap="square" lIns="0" tIns="0" rIns="0" bIns="0" rtlCol="0" anchor="ctr"/>
-          <a:lstStyle/>
-          <a:p>
-            <a:pPr indent="0" marL="0">
-              <a:buNone/>
-            </a:pPr>
-            <a:r>
-              <a:rPr lang="en-US" sz="1150" dirty="0">
-                <a:solidFill>
-                  <a:srgbClr val="1C2B36"/>
-                </a:solidFill>
-                <a:latin typeface="Calibri" pitchFamily="34" charset="0"/>
-                <a:ea typeface="Calibri" pitchFamily="34" charset="-122"/>
-                <a:cs typeface="Calibri" pitchFamily="34" charset="-120"/>
-              </a:rPr>
-              <a:t>[ Exam date ]</a:t>
+              <a:t>30 June 2026</a:t>
             </a:r>
             <a:endParaRPr lang="en-US" sz="1150" dirty="0"/>
           </a:p>
@@ -1888,24 +1615,31 @@
             <a:prstDash val="solid"/>
           </a:ln>
           <a:effectLst>
-            <a:outerShdw sx="100000" sy="100000" kx="0" ky="0" algn="bl" rotWithShape="0" blurRad="88900" dist="38100" dir="5400000">
+            <a:outerShdw blurRad="88900" dist="38100" dir="5400000" algn="bl" rotWithShape="0">
               <a:srgbClr val="000000">
                 <a:alpha val="12000"/>
               </a:srgbClr>
             </a:outerShdw>
           </a:effectLst>
         </p:spPr>
+        <p:txBody>
+          <a:bodyPr/>
+          <a:lstStyle/>
+          <a:p>
+            <a:endParaRPr lang="it-IT"/>
+          </a:p>
+        </p:txBody>
       </p:sp>
       <p:pic>
         <p:nvPicPr>
-          <p:cNvPr id="14" name="Image 1" descr="Low-homophily ego network: a fraud target surrounded mostly by benign neighbors">    </p:cNvPr>
+          <p:cNvPr id="14" name="Image 1" descr="Low-homophily ego network: a fraud target surrounded mostly by benign neighbors"/>
           <p:cNvPicPr>
             <a:picLocks noChangeAspect="1"/>
           </p:cNvPicPr>
           <p:nvPr/>
         </p:nvPicPr>
         <p:blipFill>
-          <a:blip r:embed="rId2"/>
+          <a:blip r:embed="rId4"/>
           <a:stretch>
             <a:fillRect/>
           </a:stretch>
@@ -1941,7 +1675,7 @@
           <a:bodyPr wrap="square" lIns="0" tIns="0" rIns="0" bIns="0" rtlCol="0" anchor="ctr"/>
           <a:lstStyle/>
           <a:p>
-            <a:pPr algn="ctr" indent="0" marL="0">
+            <a:pPr marL="0" indent="0" algn="ctr">
               <a:buNone/>
             </a:pPr>
             <a:r>
@@ -1953,7 +1687,7 @@
                 <a:ea typeface="Calibri" pitchFamily="34" charset="-122"/>
                 <a:cs typeface="Calibri" pitchFamily="34" charset="-120"/>
               </a:rPr>
-              <a:t>Target node v is fraudulent — yet most of its neighbors are benign.</a:t>
+              <a:t>Target node v is fraudulent, yet most of its neighbors are benign</a:t>
             </a:r>
             <a:endParaRPr lang="en-US" sz="1000" dirty="0"/>
           </a:p>
@@ -1975,6 +1709,7 @@
         <a:solidFill>
           <a:srgbClr val="F3F2EE"/>
         </a:solidFill>
+        <a:effectLst/>
       </p:bgPr>
     </p:bg>
     <p:spTree>
@@ -2012,11 +1747,11 @@
           <a:bodyPr wrap="square" lIns="0" tIns="0" rIns="0" bIns="0" rtlCol="0" anchor="ctr"/>
           <a:lstStyle/>
           <a:p>
-            <a:pPr indent="0" marL="0">
-              <a:buNone/>
-            </a:pPr>
-            <a:r>
-              <a:rPr lang="en-US" sz="1100" b="1" spc="200" kern="0" dirty="0">
+            <a:pPr marL="0" indent="0">
+              <a:buNone/>
+            </a:pPr>
+            <a:r>
+              <a:rPr lang="en-US" sz="1100" b="1" kern="0" spc="200" dirty="0">
                 <a:solidFill>
                   <a:srgbClr val="2F6E80"/>
                 </a:solidFill>
@@ -2051,7 +1786,7 @@
           <a:bodyPr wrap="square" lIns="0" tIns="0" rIns="0" bIns="0" rtlCol="0" anchor="ctr"/>
           <a:lstStyle/>
           <a:p>
-            <a:pPr indent="0" marL="0">
+            <a:pPr marL="0" indent="0">
               <a:buNone/>
             </a:pPr>
             <a:r>
@@ -2088,24 +1823,31 @@
           </a:solidFill>
           <a:ln/>
           <a:effectLst>
-            <a:outerShdw sx="100000" sy="100000" kx="0" ky="0" algn="bl" rotWithShape="0" blurRad="88900" dist="38100" dir="5400000">
+            <a:outerShdw blurRad="88900" dist="38100" dir="5400000" algn="bl" rotWithShape="0">
               <a:srgbClr val="000000">
                 <a:alpha val="12000"/>
               </a:srgbClr>
             </a:outerShdw>
           </a:effectLst>
         </p:spPr>
+        <p:txBody>
+          <a:bodyPr/>
+          <a:lstStyle/>
+          <a:p>
+            <a:endParaRPr lang="it-IT"/>
+          </a:p>
+        </p:txBody>
       </p:sp>
       <p:pic>
         <p:nvPicPr>
-          <p:cNvPr id="5" name="Image 0" descr="preencoded.png">    </p:cNvPr>
+          <p:cNvPr id="5" name="Image 0" descr="preencoded.png"/>
           <p:cNvPicPr>
             <a:picLocks noChangeAspect="1"/>
           </p:cNvPicPr>
           <p:nvPr/>
         </p:nvPicPr>
         <p:blipFill>
-          <a:blip r:embed="rId1"/>
+          <a:blip r:embed="rId3"/>
           <a:stretch>
             <a:fillRect/>
           </a:stretch>
@@ -2141,7 +1883,7 @@
           <a:bodyPr wrap="square" lIns="0" tIns="0" rIns="0" bIns="0" rtlCol="0" anchor="ctr"/>
           <a:lstStyle/>
           <a:p>
-            <a:pPr indent="0" marL="0">
+            <a:pPr marL="0" indent="0">
               <a:buNone/>
             </a:pPr>
             <a:r>
@@ -2180,7 +1922,7 @@
           <a:bodyPr wrap="square" lIns="0" tIns="0" rIns="0" bIns="0" rtlCol="0" anchor="ctr"/>
           <a:lstStyle/>
           <a:p>
-            <a:pPr indent="0" marL="0">
+            <a:pPr marL="0" indent="0">
               <a:lnSpc>
                 <a:spcPct val="102000"/>
               </a:lnSpc>
@@ -2195,7 +1937,7 @@
                 <a:ea typeface="Calibri" pitchFamily="34" charset="-122"/>
                 <a:cs typeface="Calibri" pitchFamily="34" charset="-120"/>
               </a:rPr>
-              <a:t>A fraud node connects mostly to benign nodes, so its neighborhood looks legitimate — the graph is heterophilic (low homophily).</a:t>
+              <a:t>A fraud node connects mostly to benign nodes, so its neighborhood looks legitimate: the graph is heterophilic (low homophily).</a:t>
             </a:r>
             <a:endParaRPr lang="en-US" sz="1150" dirty="0"/>
           </a:p>
@@ -2220,24 +1962,31 @@
           </a:solidFill>
           <a:ln/>
           <a:effectLst>
-            <a:outerShdw sx="100000" sy="100000" kx="0" ky="0" algn="bl" rotWithShape="0" blurRad="88900" dist="38100" dir="5400000">
+            <a:outerShdw blurRad="88900" dist="38100" dir="5400000" algn="bl" rotWithShape="0">
               <a:srgbClr val="000000">
                 <a:alpha val="12000"/>
               </a:srgbClr>
             </a:outerShdw>
           </a:effectLst>
         </p:spPr>
+        <p:txBody>
+          <a:bodyPr/>
+          <a:lstStyle/>
+          <a:p>
+            <a:endParaRPr lang="it-IT"/>
+          </a:p>
+        </p:txBody>
       </p:sp>
       <p:pic>
         <p:nvPicPr>
-          <p:cNvPr id="9" name="Image 1" descr="preencoded.png">    </p:cNvPr>
+          <p:cNvPr id="9" name="Image 1" descr="preencoded.png"/>
           <p:cNvPicPr>
             <a:picLocks noChangeAspect="1"/>
           </p:cNvPicPr>
           <p:nvPr/>
         </p:nvPicPr>
         <p:blipFill>
-          <a:blip r:embed="rId2"/>
+          <a:blip r:embed="rId4"/>
           <a:stretch>
             <a:fillRect/>
           </a:stretch>
@@ -2273,7 +2022,7 @@
           <a:bodyPr wrap="square" lIns="0" tIns="0" rIns="0" bIns="0" rtlCol="0" anchor="ctr"/>
           <a:lstStyle/>
           <a:p>
-            <a:pPr indent="0" marL="0">
+            <a:pPr marL="0" indent="0">
               <a:buNone/>
             </a:pPr>
             <a:r>
@@ -2312,7 +2061,7 @@
           <a:bodyPr wrap="square" lIns="0" tIns="0" rIns="0" bIns="0" rtlCol="0" anchor="ctr"/>
           <a:lstStyle/>
           <a:p>
-            <a:pPr indent="0" marL="0">
+            <a:pPr marL="0" indent="0">
               <a:lnSpc>
                 <a:spcPct val="102000"/>
               </a:lnSpc>
@@ -2327,7 +2076,7 @@
                 <a:ea typeface="Calibri" pitchFamily="34" charset="-122"/>
                 <a:cs typeface="Calibri" pitchFamily="34" charset="-120"/>
               </a:rPr>
-              <a:t>Message-passing GNNs average neighbors, implicitly assuming they share the target's label. Under heterophily this dilutes the fraud signal into the benign majority.</a:t>
+              <a:t>Message-passing GNNs average neighbors, implicitly assuming they share the target's label. Under heterophily this dilutes the fraud signal into the benign majority</a:t>
             </a:r>
             <a:endParaRPr lang="en-US" sz="1150" dirty="0"/>
           </a:p>
@@ -2359,13 +2108,20 @@
             <a:prstDash val="solid"/>
           </a:ln>
           <a:effectLst>
-            <a:outerShdw sx="100000" sy="100000" kx="0" ky="0" algn="bl" rotWithShape="0" blurRad="88900" dist="38100" dir="5400000">
+            <a:outerShdw blurRad="88900" dist="38100" dir="5400000" algn="bl" rotWithShape="0">
               <a:srgbClr val="000000">
                 <a:alpha val="12000"/>
               </a:srgbClr>
             </a:outerShdw>
           </a:effectLst>
         </p:spPr>
+        <p:txBody>
+          <a:bodyPr/>
+          <a:lstStyle/>
+          <a:p>
+            <a:endParaRPr lang="it-IT"/>
+          </a:p>
+        </p:txBody>
       </p:sp>
       <p:sp>
         <p:nvSpPr>
@@ -2386,24 +2142,31 @@
           </a:solidFill>
           <a:ln/>
           <a:effectLst>
-            <a:outerShdw sx="100000" sy="100000" kx="0" ky="0" algn="bl" rotWithShape="0" blurRad="88900" dist="38100" dir="5400000">
+            <a:outerShdw blurRad="88900" dist="38100" dir="5400000" algn="bl" rotWithShape="0">
               <a:srgbClr val="000000">
                 <a:alpha val="12000"/>
               </a:srgbClr>
             </a:outerShdw>
           </a:effectLst>
         </p:spPr>
+        <p:txBody>
+          <a:bodyPr/>
+          <a:lstStyle/>
+          <a:p>
+            <a:endParaRPr lang="it-IT"/>
+          </a:p>
+        </p:txBody>
       </p:sp>
       <p:pic>
         <p:nvPicPr>
-          <p:cNvPr id="14" name="Image 2" descr="preencoded.png">    </p:cNvPr>
+          <p:cNvPr id="14" name="Image 2" descr="preencoded.png"/>
           <p:cNvPicPr>
             <a:picLocks noChangeAspect="1"/>
           </p:cNvPicPr>
           <p:nvPr/>
         </p:nvPicPr>
         <p:blipFill>
-          <a:blip r:embed="rId3"/>
+          <a:blip r:embed="rId5"/>
           <a:stretch>
             <a:fillRect/>
           </a:stretch>
@@ -2439,14 +2202,14 @@
           <a:bodyPr wrap="square" lIns="0" tIns="0" rIns="0" bIns="0" rtlCol="0" anchor="ctr"/>
           <a:lstStyle/>
           <a:p>
-            <a:pPr indent="0" marL="0">
+            <a:pPr marL="0" indent="0">
               <a:lnSpc>
                 <a:spcPct val="102000"/>
               </a:lnSpc>
               <a:buNone/>
             </a:pPr>
             <a:r>
-              <a:rPr lang="en-US" sz="1150" b="1" spc="100" kern="0" dirty="0">
+              <a:rPr lang="en-US" sz="1150" b="1" kern="0" spc="100" dirty="0">
                 <a:solidFill>
                   <a:srgbClr val="2F6E80"/>
                 </a:solidFill>
@@ -2454,14 +2217,8 @@
                 <a:ea typeface="Calibri" pitchFamily="34" charset="-122"/>
                 <a:cs typeface="Calibri" pitchFamily="34" charset="-120"/>
               </a:rPr>
-              <a:t>AIM   </a:t>
-            </a:r>
-            <a:pPr indent="0" marL="0">
-              <a:lnSpc>
-                <a:spcPct val="102000"/>
-              </a:lnSpc>
-              <a:buNone/>
-            </a:pPr>
+              <a:t>GOAL: </a:t>
+            </a:r>
             <a:r>
               <a:rPr lang="en-US" sz="1150" dirty="0">
                 <a:solidFill>
@@ -2471,7 +2228,18 @@
                 <a:ea typeface="Calibri" pitchFamily="34" charset="-122"/>
                 <a:cs typeface="Calibri" pitchFamily="34" charset="-120"/>
               </a:rPr>
-              <a:t>Reproduce GAGA and quantify how its group aggregation and learnable encodings each contribute — via ablation &amp; sensitivity analysis on Amazon and YelpChi.</a:t>
+              <a:t>Reproduce GAGA and quantify how its group aggregation and learnable encodings each contribute Amazon and </a:t>
+            </a:r>
+            <a:r>
+              <a:rPr lang="en-US" sz="1150" dirty="0" err="1">
+                <a:solidFill>
+                  <a:srgbClr val="1C2B36"/>
+                </a:solidFill>
+                <a:latin typeface="Calibri" pitchFamily="34" charset="0"/>
+                <a:ea typeface="Calibri" pitchFamily="34" charset="-122"/>
+                <a:cs typeface="Calibri" pitchFamily="34" charset="-120"/>
+              </a:rPr>
+              <a:t>YelpChi</a:t>
             </a:r>
             <a:endParaRPr lang="en-US" sz="1150" dirty="0"/>
           </a:p>
@@ -2503,24 +2271,31 @@
             <a:prstDash val="solid"/>
           </a:ln>
           <a:effectLst>
-            <a:outerShdw sx="100000" sy="100000" kx="0" ky="0" algn="bl" rotWithShape="0" blurRad="88900" dist="38100" dir="5400000">
+            <a:outerShdw blurRad="88900" dist="38100" dir="5400000" algn="bl" rotWithShape="0">
               <a:srgbClr val="000000">
                 <a:alpha val="12000"/>
               </a:srgbClr>
             </a:outerShdw>
           </a:effectLst>
         </p:spPr>
+        <p:txBody>
+          <a:bodyPr/>
+          <a:lstStyle/>
+          <a:p>
+            <a:endParaRPr lang="it-IT"/>
+          </a:p>
+        </p:txBody>
       </p:sp>
       <p:pic>
         <p:nvPicPr>
-          <p:cNvPr id="17" name="Image 3" descr="Low-homophily ego network illustration">    </p:cNvPr>
+          <p:cNvPr id="17" name="Image 3" descr="Low-homophily ego network illustration"/>
           <p:cNvPicPr>
             <a:picLocks noChangeAspect="1"/>
           </p:cNvPicPr>
           <p:nvPr/>
         </p:nvPicPr>
         <p:blipFill>
-          <a:blip r:embed="rId4"/>
+          <a:blip r:embed="rId6"/>
           <a:stretch>
             <a:fillRect/>
           </a:stretch>
@@ -2556,23 +2331,12 @@
           <a:bodyPr wrap="square" lIns="0" tIns="0" rIns="0" bIns="0" rtlCol="0" anchor="ctr"/>
           <a:lstStyle/>
           <a:p>
-            <a:pPr algn="ctr" indent="0" marL="0">
+            <a:pPr marL="0" indent="0" algn="ctr">
               <a:lnSpc>
                 <a:spcPct val="100000"/>
               </a:lnSpc>
               <a:buNone/>
             </a:pPr>
-            <a:r>
-              <a:rPr lang="en-US" sz="1000" i="1" dirty="0">
-                <a:solidFill>
-                  <a:srgbClr val="6B7280"/>
-                </a:solidFill>
-                <a:latin typeface="Calibri" pitchFamily="34" charset="0"/>
-                <a:ea typeface="Calibri" pitchFamily="34" charset="-122"/>
-                <a:cs typeface="Calibri" pitchFamily="34" charset="-120"/>
-              </a:rPr>
-              <a:t>A low-homophily ego-network. Fraud = red, benign = teal; the gold-ringed node is the masked target v.</a:t>
-            </a:r>
             <a:endParaRPr lang="en-US" sz="1000" dirty="0"/>
           </a:p>
         </p:txBody>
@@ -2593,6 +2357,7 @@
         <a:solidFill>
           <a:srgbClr val="F3F2EE"/>
         </a:solidFill>
+        <a:effectLst/>
       </p:bgPr>
     </p:bg>
     <p:spTree>
@@ -2630,11 +2395,11 @@
           <a:bodyPr wrap="square" lIns="0" tIns="0" rIns="0" bIns="0" rtlCol="0" anchor="ctr"/>
           <a:lstStyle/>
           <a:p>
-            <a:pPr indent="0" marL="0">
-              <a:buNone/>
-            </a:pPr>
-            <a:r>
-              <a:rPr lang="en-US" sz="1100" b="1" spc="200" kern="0" dirty="0">
+            <a:pPr marL="0" indent="0">
+              <a:buNone/>
+            </a:pPr>
+            <a:r>
+              <a:rPr lang="en-US" sz="1100" b="1" kern="0" spc="200" dirty="0">
                 <a:solidFill>
                   <a:srgbClr val="2F6E80"/>
                 </a:solidFill>
@@ -2669,7 +2434,7 @@
           <a:bodyPr wrap="square" lIns="0" tIns="0" rIns="0" bIns="0" rtlCol="0" anchor="ctr"/>
           <a:lstStyle/>
           <a:p>
-            <a:pPr indent="0" marL="0">
+            <a:pPr marL="0" indent="0">
               <a:buNone/>
             </a:pPr>
             <a:r>
@@ -2713,13 +2478,20 @@
             <a:prstDash val="solid"/>
           </a:ln>
           <a:effectLst>
-            <a:outerShdw sx="100000" sy="100000" kx="0" ky="0" algn="bl" rotWithShape="0" blurRad="88900" dist="38100" dir="5400000">
+            <a:outerShdw blurRad="88900" dist="38100" dir="5400000" algn="bl" rotWithShape="0">
               <a:srgbClr val="000000">
                 <a:alpha val="12000"/>
               </a:srgbClr>
             </a:outerShdw>
           </a:effectLst>
         </p:spPr>
+        <p:txBody>
+          <a:bodyPr/>
+          <a:lstStyle/>
+          <a:p>
+            <a:endParaRPr lang="it-IT"/>
+          </a:p>
+        </p:txBody>
       </p:sp>
       <p:sp>
         <p:nvSpPr>
@@ -2740,24 +2512,31 @@
           </a:solidFill>
           <a:ln/>
           <a:effectLst>
-            <a:outerShdw sx="100000" sy="100000" kx="0" ky="0" algn="bl" rotWithShape="0" blurRad="88900" dist="38100" dir="5400000">
+            <a:outerShdw blurRad="88900" dist="38100" dir="5400000" algn="bl" rotWithShape="0">
               <a:srgbClr val="000000">
                 <a:alpha val="12000"/>
               </a:srgbClr>
             </a:outerShdw>
           </a:effectLst>
         </p:spPr>
+        <p:txBody>
+          <a:bodyPr/>
+          <a:lstStyle/>
+          <a:p>
+            <a:endParaRPr lang="it-IT"/>
+          </a:p>
+        </p:txBody>
       </p:sp>
       <p:pic>
         <p:nvPicPr>
-          <p:cNvPr id="6" name="Image 0" descr="preencoded.png">    </p:cNvPr>
+          <p:cNvPr id="6" name="Image 0" descr="preencoded.png"/>
           <p:cNvPicPr>
             <a:picLocks noChangeAspect="1"/>
           </p:cNvPicPr>
           <p:nvPr/>
         </p:nvPicPr>
         <p:blipFill>
-          <a:blip r:embed="rId1"/>
+          <a:blip r:embed="rId3"/>
           <a:stretch>
             <a:fillRect/>
           </a:stretch>
@@ -2793,7 +2572,7 @@
           <a:bodyPr wrap="square" lIns="0" tIns="0" rIns="0" bIns="0" rtlCol="0" anchor="ctr"/>
           <a:lstStyle/>
           <a:p>
-            <a:pPr indent="0" marL="0">
+            <a:pPr marL="0" indent="0">
               <a:lnSpc>
                 <a:spcPct val="100000"/>
               </a:lnSpc>
@@ -2810,12 +2589,6 @@
               </a:rPr>
               <a:t>Key idea   </a:t>
             </a:r>
-            <a:pPr indent="0" marL="0">
-              <a:lnSpc>
-                <a:spcPct val="100000"/>
-              </a:lnSpc>
-              <a:buNone/>
-            </a:pPr>
             <a:r>
               <a:rPr lang="en-US" sz="1200" dirty="0">
                 <a:solidFill>
@@ -2825,7 +2598,7 @@
                 <a:ea typeface="Calibri" pitchFamily="34" charset="-122"/>
                 <a:cs typeface="Calibri" pitchFamily="34" charset="-120"/>
               </a:rPr>
-              <a:t>Instead of averaging all neighbors into one vector, group them by label (benign / fraud / masked) and let a Transformer re-weight the groups — so the fraud signal is never smoothed away.</a:t>
+              <a:t>Instead of averaging all neighbors into one vector, group them by label (benign / fraud / masked) and let a Transformer re-weight the groups, so the fraud signal is never smoothed away</a:t>
             </a:r>
             <a:endParaRPr lang="en-US" sz="1200" dirty="0"/>
           </a:p>
@@ -2840,48 +2613,39 @@
         <p:spPr>
           <a:xfrm>
             <a:off x="502920" y="2212848"/>
-            <a:ext cx="3703320" cy="2606040"/>
+            <a:ext cx="4687645" cy="2606040"/>
           </a:xfrm>
           <a:prstGeom prst="roundRect">
             <a:avLst>
               <a:gd name="adj" fmla="val 3158"/>
             </a:avLst>
           </a:prstGeom>
-          <a:solidFill>
-            <a:srgbClr val="ECEAE3"/>
-          </a:solidFill>
+          <a:blipFill dpi="0" rotWithShape="1">
+            <a:blip r:embed="rId4">
+              <a:extLst>
+                <a:ext uri="{28A0092B-C50C-407E-A947-70E740481C1C}">
+                  <a14:useLocalDpi xmlns:a14="http://schemas.microsoft.com/office/drawing/2010/main" val="0"/>
+                </a:ext>
+              </a:extLst>
+            </a:blip>
+            <a:srcRect/>
+            <a:stretch>
+              <a:fillRect/>
+            </a:stretch>
+          </a:blipFill>
           <a:ln w="12700">
-            <a:solidFill>
-              <a:srgbClr val="6B7280"/>
-            </a:solidFill>
+            <a:noFill/>
             <a:prstDash val="dash"/>
           </a:ln>
         </p:spPr>
-      </p:sp>
-      <p:pic>
-        <p:nvPicPr>
-          <p:cNvPr id="9" name="Image 1" descr="preencoded.png">    </p:cNvPr>
-          <p:cNvPicPr>
-            <a:picLocks noChangeAspect="1"/>
-          </p:cNvPicPr>
-          <p:nvPr/>
-        </p:nvPicPr>
-        <p:blipFill>
-          <a:blip r:embed="rId2"/>
-          <a:stretch>
-            <a:fillRect/>
-          </a:stretch>
-        </p:blipFill>
-        <p:spPr>
-          <a:xfrm>
-            <a:off x="2080260" y="3087929"/>
-            <a:ext cx="548640" cy="548640"/>
-          </a:xfrm>
-          <a:prstGeom prst="rect">
-            <a:avLst/>
-          </a:prstGeom>
-        </p:spPr>
-      </p:pic>
+        <p:txBody>
+          <a:bodyPr/>
+          <a:lstStyle/>
+          <a:p>
+            <a:endParaRPr lang="it-IT"/>
+          </a:p>
+        </p:txBody>
+      </p:sp>
       <p:sp>
         <p:nvSpPr>
           <p:cNvPr id="10" name="Text 6"/>
@@ -2903,11 +2667,11 @@
           <a:bodyPr wrap="square" lIns="0" tIns="0" rIns="0" bIns="0" rtlCol="0" anchor="ctr"/>
           <a:lstStyle/>
           <a:p>
-            <a:pPr algn="ctr" indent="0" marL="0">
-              <a:buNone/>
-            </a:pPr>
-            <a:r>
-              <a:rPr lang="en-US" sz="1000" b="1" spc="150" kern="0" dirty="0">
+            <a:pPr marL="0" indent="0" algn="ctr">
+              <a:buNone/>
+            </a:pPr>
+            <a:r>
+              <a:rPr lang="en-US" sz="1000" b="1" kern="0" spc="150" dirty="0">
                 <a:solidFill>
                   <a:srgbClr val="6B7280"/>
                 </a:solidFill>
@@ -2942,25 +2706,105 @@
           <a:bodyPr wrap="square" lIns="0" tIns="0" rIns="0" bIns="0" rtlCol="0" anchor="t"/>
           <a:lstStyle/>
           <a:p>
-            <a:pPr algn="ctr" indent="0" marL="0">
-              <a:buNone/>
-            </a:pPr>
-            <a:r>
-              <a:rPr lang="en-US" sz="950" b="1" dirty="0">
-                <a:solidFill>
-                  <a:srgbClr val="2F6E80"/>
+            <a:pPr marL="0" indent="0" algn="ctr">
+              <a:buNone/>
+            </a:pPr>
+            <a:endParaRPr lang="en-US" sz="950" dirty="0"/>
+          </a:p>
+        </p:txBody>
+      </p:sp>
+      <p:sp>
+        <p:nvSpPr>
+          <p:cNvPr id="12" name="Shape 8"/>
+          <p:cNvSpPr/>
+          <p:nvPr/>
+        </p:nvSpPr>
+        <p:spPr>
+          <a:xfrm>
+            <a:off x="5354955" y="2212848"/>
+            <a:ext cx="365760" cy="365760"/>
+          </a:xfrm>
+          <a:prstGeom prst="ellipse">
+            <a:avLst/>
+          </a:prstGeom>
+          <a:solidFill>
+            <a:srgbClr val="2F6E80"/>
+          </a:solidFill>
+          <a:ln/>
+        </p:spPr>
+        <p:txBody>
+          <a:bodyPr/>
+          <a:lstStyle/>
+          <a:p>
+            <a:endParaRPr lang="it-IT"/>
+          </a:p>
+        </p:txBody>
+      </p:sp>
+      <p:sp>
+        <p:nvSpPr>
+          <p:cNvPr id="13" name="Text 9"/>
+          <p:cNvSpPr/>
+          <p:nvPr/>
+        </p:nvSpPr>
+        <p:spPr>
+          <a:xfrm>
+            <a:off x="5354955" y="2212848"/>
+            <a:ext cx="365760" cy="365760"/>
+          </a:xfrm>
+          <a:prstGeom prst="rect">
+            <a:avLst/>
+          </a:prstGeom>
+          <a:noFill/>
+          <a:ln/>
+        </p:spPr>
+        <p:txBody>
+          <a:bodyPr wrap="square" lIns="0" tIns="0" rIns="0" bIns="0" rtlCol="0" anchor="ctr"/>
+          <a:lstStyle/>
+          <a:p>
+            <a:pPr marL="0" indent="0" algn="ctr">
+              <a:buNone/>
+            </a:pPr>
+            <a:r>
+              <a:rPr lang="en-US" sz="1300" b="1" dirty="0">
+                <a:solidFill>
+                  <a:srgbClr val="FFFFFF"/>
                 </a:solidFill>
                 <a:latin typeface="Calibri" pitchFamily="34" charset="0"/>
                 <a:ea typeface="Calibri" pitchFamily="34" charset="-122"/>
                 <a:cs typeface="Calibri" pitchFamily="34" charset="-120"/>
               </a:rPr>
-              <a:t>/alt  </a:t>
-            </a:r>
-            <a:pPr algn="ctr" indent="0" marL="0">
-              <a:buNone/>
-            </a:pPr>
-            <a:r>
-              <a:rPr lang="en-US" sz="950" i="1" dirty="0">
+              <a:t>1</a:t>
+            </a:r>
+            <a:endParaRPr lang="en-US" sz="1300" dirty="0"/>
+          </a:p>
+        </p:txBody>
+      </p:sp>
+      <p:sp>
+        <p:nvSpPr>
+          <p:cNvPr id="14" name="Text 10"/>
+          <p:cNvSpPr/>
+          <p:nvPr/>
+        </p:nvSpPr>
+        <p:spPr>
+          <a:xfrm>
+            <a:off x="5857875" y="2176272"/>
+            <a:ext cx="3657600" cy="274320"/>
+          </a:xfrm>
+          <a:prstGeom prst="rect">
+            <a:avLst/>
+          </a:prstGeom>
+          <a:noFill/>
+          <a:ln/>
+        </p:spPr>
+        <p:txBody>
+          <a:bodyPr wrap="square" lIns="0" tIns="0" rIns="0" bIns="0" rtlCol="0" anchor="ctr"/>
+          <a:lstStyle/>
+          <a:p>
+            <a:pPr marL="0" indent="0">
+              <a:buNone/>
+            </a:pPr>
+            <a:r>
+              <a:rPr lang="en-US" sz="1250" b="1" dirty="0">
                 <a:solidFill>
                   <a:srgbClr val="1C2B36"/>
                 </a:solidFill>
@@ -2968,21 +2812,63 @@
                 <a:ea typeface="Calibri" pitchFamily="34" charset="-122"/>
                 <a:cs typeface="Calibri" pitchFamily="34" charset="-120"/>
               </a:rPr>
-              <a:t>GAGA architecture (Fig. 2): multi-relational graph → group aggregation → learnable encodings → Transformer encoder → inter-aggregation → MLP</a:t>
-            </a:r>
-            <a:endParaRPr lang="en-US" sz="950" dirty="0"/>
-          </a:p>
-        </p:txBody>
-      </p:sp>
-      <p:sp>
-        <p:nvSpPr>
-          <p:cNvPr id="12" name="Shape 8"/>
-          <p:cNvSpPr/>
-          <p:nvPr/>
-        </p:nvSpPr>
-        <p:spPr>
-          <a:xfrm>
-            <a:off x="4526280" y="2212848"/>
+              <a:t>Group Aggregation</a:t>
+            </a:r>
+            <a:endParaRPr lang="en-US" sz="1250" dirty="0"/>
+          </a:p>
+        </p:txBody>
+      </p:sp>
+      <p:sp>
+        <p:nvSpPr>
+          <p:cNvPr id="15" name="Text 11"/>
+          <p:cNvSpPr/>
+          <p:nvPr/>
+        </p:nvSpPr>
+        <p:spPr>
+          <a:xfrm>
+            <a:off x="5857875" y="2427732"/>
+            <a:ext cx="2783205" cy="310896"/>
+          </a:xfrm>
+          <a:prstGeom prst="rect">
+            <a:avLst/>
+          </a:prstGeom>
+          <a:noFill/>
+          <a:ln/>
+        </p:spPr>
+        <p:txBody>
+          <a:bodyPr wrap="square" lIns="0" tIns="0" rIns="0" bIns="0" rtlCol="0" anchor="ctr"/>
+          <a:lstStyle/>
+          <a:p>
+            <a:pPr marL="0" indent="0">
+              <a:lnSpc>
+                <a:spcPct val="95000"/>
+              </a:lnSpc>
+              <a:buNone/>
+            </a:pPr>
+            <a:r>
+              <a:rPr lang="en-US" sz="980" dirty="0">
+                <a:solidFill>
+                  <a:srgbClr val="6B7280"/>
+                </a:solidFill>
+                <a:latin typeface="Calibri" pitchFamily="34" charset="0"/>
+                <a:ea typeface="Calibri" pitchFamily="34" charset="-122"/>
+                <a:cs typeface="Calibri" pitchFamily="34" charset="-120"/>
+              </a:rPr>
+              <a:t>Pool neighbors per label group, per hop &amp; relation — weight-free preprocessing.</a:t>
+            </a:r>
+            <a:endParaRPr lang="en-US" sz="980" dirty="0"/>
+          </a:p>
+        </p:txBody>
+      </p:sp>
+      <p:sp>
+        <p:nvSpPr>
+          <p:cNvPr id="16" name="Shape 12"/>
+          <p:cNvSpPr/>
+          <p:nvPr/>
+        </p:nvSpPr>
+        <p:spPr>
+          <a:xfrm>
+            <a:off x="5354955" y="2738628"/>
             <a:ext cx="365760" cy="365760"/>
           </a:xfrm>
           <a:prstGeom prst="ellipse">
@@ -2993,16 +2879,23 @@
           </a:solidFill>
           <a:ln/>
         </p:spPr>
-      </p:sp>
-      <p:sp>
-        <p:nvSpPr>
-          <p:cNvPr id="13" name="Text 9"/>
-          <p:cNvSpPr/>
-          <p:nvPr/>
-        </p:nvSpPr>
-        <p:spPr>
-          <a:xfrm>
-            <a:off x="4526280" y="2212848"/>
+        <p:txBody>
+          <a:bodyPr/>
+          <a:lstStyle/>
+          <a:p>
+            <a:endParaRPr lang="it-IT"/>
+          </a:p>
+        </p:txBody>
+      </p:sp>
+      <p:sp>
+        <p:nvSpPr>
+          <p:cNvPr id="17" name="Text 13"/>
+          <p:cNvSpPr/>
+          <p:nvPr/>
+        </p:nvSpPr>
+        <p:spPr>
+          <a:xfrm>
+            <a:off x="5354955" y="2738628"/>
             <a:ext cx="365760" cy="365760"/>
           </a:xfrm>
           <a:prstGeom prst="rect">
@@ -3015,7 +2908,7 @@
           <a:bodyPr wrap="square" lIns="0" tIns="0" rIns="0" bIns="0" rtlCol="0" anchor="ctr"/>
           <a:lstStyle/>
           <a:p>
-            <a:pPr algn="ctr" indent="0" marL="0">
+            <a:pPr marL="0" indent="0" algn="ctr">
               <a:buNone/>
             </a:pPr>
             <a:r>
@@ -3027,7 +2920,7 @@
                 <a:ea typeface="Calibri" pitchFamily="34" charset="-122"/>
                 <a:cs typeface="Calibri" pitchFamily="34" charset="-120"/>
               </a:rPr>
-              <a:t>1</a:t>
+              <a:t>2</a:t>
             </a:r>
             <a:endParaRPr lang="en-US" sz="1300" dirty="0"/>
           </a:p>
@@ -3035,13 +2928,13 @@
       </p:sp>
       <p:sp>
         <p:nvSpPr>
-          <p:cNvPr id="14" name="Text 10"/>
-          <p:cNvSpPr/>
-          <p:nvPr/>
-        </p:nvSpPr>
-        <p:spPr>
-          <a:xfrm>
-            <a:off x="5029200" y="2176272"/>
+          <p:cNvPr id="18" name="Text 14"/>
+          <p:cNvSpPr/>
+          <p:nvPr/>
+        </p:nvSpPr>
+        <p:spPr>
+          <a:xfrm>
+            <a:off x="5857875" y="2702052"/>
             <a:ext cx="3657600" cy="274320"/>
           </a:xfrm>
           <a:prstGeom prst="rect">
@@ -3054,7 +2947,7 @@
           <a:bodyPr wrap="square" lIns="0" tIns="0" rIns="0" bIns="0" rtlCol="0" anchor="ctr"/>
           <a:lstStyle/>
           <a:p>
-            <a:pPr indent="0" marL="0">
+            <a:pPr marL="0" indent="0">
               <a:buNone/>
             </a:pPr>
             <a:r>
@@ -3066,7 +2959,7 @@
                 <a:ea typeface="Calibri" pitchFamily="34" charset="-122"/>
                 <a:cs typeface="Calibri" pitchFamily="34" charset="-120"/>
               </a:rPr>
-              <a:t>Group Aggregation</a:t>
+              <a:t>Linear Projection</a:t>
             </a:r>
             <a:endParaRPr lang="en-US" sz="1250" dirty="0"/>
           </a:p>
@@ -3074,26 +2967,26 @@
       </p:sp>
       <p:sp>
         <p:nvSpPr>
-          <p:cNvPr id="15" name="Text 11"/>
-          <p:cNvSpPr/>
-          <p:nvPr/>
-        </p:nvSpPr>
-        <p:spPr>
-          <a:xfrm>
-            <a:off x="5029200" y="2427732"/>
-            <a:ext cx="3657600" cy="310896"/>
-          </a:xfrm>
-          <a:prstGeom prst="rect">
-            <a:avLst/>
-          </a:prstGeom>
-          <a:noFill/>
-          <a:ln/>
-        </p:spPr>
-        <p:txBody>
-          <a:bodyPr wrap="square" lIns="0" tIns="0" rIns="0" bIns="0" rtlCol="0" anchor="ctr"/>
-          <a:lstStyle/>
-          <a:p>
-            <a:pPr indent="0" marL="0">
+          <p:cNvPr id="19" name="Text 15"/>
+          <p:cNvSpPr/>
+          <p:nvPr/>
+        </p:nvSpPr>
+        <p:spPr>
+          <a:xfrm>
+            <a:off x="5857875" y="2953512"/>
+            <a:ext cx="2783205" cy="310896"/>
+          </a:xfrm>
+          <a:prstGeom prst="rect">
+            <a:avLst/>
+          </a:prstGeom>
+          <a:noFill/>
+          <a:ln/>
+        </p:spPr>
+        <p:txBody>
+          <a:bodyPr wrap="square" lIns="0" tIns="0" rIns="0" bIns="0" rtlCol="0" anchor="ctr"/>
+          <a:lstStyle/>
+          <a:p>
+            <a:pPr marL="0" indent="0">
               <a:lnSpc>
                 <a:spcPct val="95000"/>
               </a:lnSpc>
@@ -3108,7 +3001,7 @@
                 <a:ea typeface="Calibri" pitchFamily="34" charset="-122"/>
                 <a:cs typeface="Calibri" pitchFamily="34" charset="-120"/>
               </a:rPr>
-              <a:t>Pool neighbors per label group, per hop &amp; relation — weight-free preprocessing.</a:t>
+              <a:t>Lift each group vector to hidden size dH.</a:t>
             </a:r>
             <a:endParaRPr lang="en-US" sz="980" dirty="0"/>
           </a:p>
@@ -3116,13 +3009,13 @@
       </p:sp>
       <p:sp>
         <p:nvSpPr>
-          <p:cNvPr id="16" name="Shape 12"/>
-          <p:cNvSpPr/>
-          <p:nvPr/>
-        </p:nvSpPr>
-        <p:spPr>
-          <a:xfrm>
-            <a:off x="4526280" y="2738628"/>
+          <p:cNvPr id="20" name="Shape 16"/>
+          <p:cNvSpPr/>
+          <p:nvPr/>
+        </p:nvSpPr>
+        <p:spPr>
+          <a:xfrm>
+            <a:off x="5354955" y="3264408"/>
             <a:ext cx="365760" cy="365760"/>
           </a:xfrm>
           <a:prstGeom prst="ellipse">
@@ -3133,16 +3026,23 @@
           </a:solidFill>
           <a:ln/>
         </p:spPr>
-      </p:sp>
-      <p:sp>
-        <p:nvSpPr>
-          <p:cNvPr id="17" name="Text 13"/>
-          <p:cNvSpPr/>
-          <p:nvPr/>
-        </p:nvSpPr>
-        <p:spPr>
-          <a:xfrm>
-            <a:off x="4526280" y="2738628"/>
+        <p:txBody>
+          <a:bodyPr/>
+          <a:lstStyle/>
+          <a:p>
+            <a:endParaRPr lang="it-IT"/>
+          </a:p>
+        </p:txBody>
+      </p:sp>
+      <p:sp>
+        <p:nvSpPr>
+          <p:cNvPr id="21" name="Text 17"/>
+          <p:cNvSpPr/>
+          <p:nvPr/>
+        </p:nvSpPr>
+        <p:spPr>
+          <a:xfrm>
+            <a:off x="5354955" y="3264408"/>
             <a:ext cx="365760" cy="365760"/>
           </a:xfrm>
           <a:prstGeom prst="rect">
@@ -3155,7 +3055,7 @@
           <a:bodyPr wrap="square" lIns="0" tIns="0" rIns="0" bIns="0" rtlCol="0" anchor="ctr"/>
           <a:lstStyle/>
           <a:p>
-            <a:pPr algn="ctr" indent="0" marL="0">
+            <a:pPr marL="0" indent="0" algn="ctr">
               <a:buNone/>
             </a:pPr>
             <a:r>
@@ -3167,7 +3067,7 @@
                 <a:ea typeface="Calibri" pitchFamily="34" charset="-122"/>
                 <a:cs typeface="Calibri" pitchFamily="34" charset="-120"/>
               </a:rPr>
-              <a:t>2</a:t>
+              <a:t>3</a:t>
             </a:r>
             <a:endParaRPr lang="en-US" sz="1300" dirty="0"/>
           </a:p>
@@ -3175,13 +3075,13 @@
       </p:sp>
       <p:sp>
         <p:nvSpPr>
-          <p:cNvPr id="18" name="Text 14"/>
-          <p:cNvSpPr/>
-          <p:nvPr/>
-        </p:nvSpPr>
-        <p:spPr>
-          <a:xfrm>
-            <a:off x="5029200" y="2702052"/>
+          <p:cNvPr id="22" name="Text 18"/>
+          <p:cNvSpPr/>
+          <p:nvPr/>
+        </p:nvSpPr>
+        <p:spPr>
+          <a:xfrm>
+            <a:off x="5857875" y="3227832"/>
             <a:ext cx="3657600" cy="274320"/>
           </a:xfrm>
           <a:prstGeom prst="rect">
@@ -3194,7 +3094,7 @@
           <a:bodyPr wrap="square" lIns="0" tIns="0" rIns="0" bIns="0" rtlCol="0" anchor="ctr"/>
           <a:lstStyle/>
           <a:p>
-            <a:pPr indent="0" marL="0">
+            <a:pPr marL="0" indent="0">
               <a:buNone/>
             </a:pPr>
             <a:r>
@@ -3206,7 +3106,7 @@
                 <a:ea typeface="Calibri" pitchFamily="34" charset="-122"/>
                 <a:cs typeface="Calibri" pitchFamily="34" charset="-120"/>
               </a:rPr>
-              <a:t>Linear Projection</a:t>
+              <a:t>Learnable Encodings</a:t>
             </a:r>
             <a:endParaRPr lang="en-US" sz="1250" dirty="0"/>
           </a:p>
@@ -3214,26 +3114,26 @@
       </p:sp>
       <p:sp>
         <p:nvSpPr>
-          <p:cNvPr id="19" name="Text 15"/>
-          <p:cNvSpPr/>
-          <p:nvPr/>
-        </p:nvSpPr>
-        <p:spPr>
-          <a:xfrm>
-            <a:off x="5029200" y="2953512"/>
-            <a:ext cx="3657600" cy="310896"/>
-          </a:xfrm>
-          <a:prstGeom prst="rect">
-            <a:avLst/>
-          </a:prstGeom>
-          <a:noFill/>
-          <a:ln/>
-        </p:spPr>
-        <p:txBody>
-          <a:bodyPr wrap="square" lIns="0" tIns="0" rIns="0" bIns="0" rtlCol="0" anchor="ctr"/>
-          <a:lstStyle/>
-          <a:p>
-            <a:pPr indent="0" marL="0">
+          <p:cNvPr id="23" name="Text 19"/>
+          <p:cNvSpPr/>
+          <p:nvPr/>
+        </p:nvSpPr>
+        <p:spPr>
+          <a:xfrm>
+            <a:off x="5857875" y="3479292"/>
+            <a:ext cx="2783205" cy="310896"/>
+          </a:xfrm>
+          <a:prstGeom prst="rect">
+            <a:avLst/>
+          </a:prstGeom>
+          <a:noFill/>
+          <a:ln/>
+        </p:spPr>
+        <p:txBody>
+          <a:bodyPr wrap="square" lIns="0" tIns="0" rIns="0" bIns="0" rtlCol="0" anchor="ctr"/>
+          <a:lstStyle/>
+          <a:p>
+            <a:pPr marL="0" indent="0">
               <a:lnSpc>
                 <a:spcPct val="95000"/>
               </a:lnSpc>
@@ -3248,7 +3148,7 @@
                 <a:ea typeface="Calibri" pitchFamily="34" charset="-122"/>
                 <a:cs typeface="Calibri" pitchFamily="34" charset="-120"/>
               </a:rPr>
-              <a:t>Lift each group vector to hidden size dH.</a:t>
+              <a:t>Add hop, relation &amp; group (label) stamps: Xin = Xs+Xh+Xr+Xg.</a:t>
             </a:r>
             <a:endParaRPr lang="en-US" sz="980" dirty="0"/>
           </a:p>
@@ -3256,13 +3156,13 @@
       </p:sp>
       <p:sp>
         <p:nvSpPr>
-          <p:cNvPr id="20" name="Shape 16"/>
-          <p:cNvSpPr/>
-          <p:nvPr/>
-        </p:nvSpPr>
-        <p:spPr>
-          <a:xfrm>
-            <a:off x="4526280" y="3264408"/>
+          <p:cNvPr id="24" name="Shape 20"/>
+          <p:cNvSpPr/>
+          <p:nvPr/>
+        </p:nvSpPr>
+        <p:spPr>
+          <a:xfrm>
+            <a:off x="5354955" y="3790188"/>
             <a:ext cx="365760" cy="365760"/>
           </a:xfrm>
           <a:prstGeom prst="ellipse">
@@ -3273,16 +3173,23 @@
           </a:solidFill>
           <a:ln/>
         </p:spPr>
-      </p:sp>
-      <p:sp>
-        <p:nvSpPr>
-          <p:cNvPr id="21" name="Text 17"/>
-          <p:cNvSpPr/>
-          <p:nvPr/>
-        </p:nvSpPr>
-        <p:spPr>
-          <a:xfrm>
-            <a:off x="4526280" y="3264408"/>
+        <p:txBody>
+          <a:bodyPr/>
+          <a:lstStyle/>
+          <a:p>
+            <a:endParaRPr lang="it-IT"/>
+          </a:p>
+        </p:txBody>
+      </p:sp>
+      <p:sp>
+        <p:nvSpPr>
+          <p:cNvPr id="25" name="Text 21"/>
+          <p:cNvSpPr/>
+          <p:nvPr/>
+        </p:nvSpPr>
+        <p:spPr>
+          <a:xfrm>
+            <a:off x="5354955" y="3790188"/>
             <a:ext cx="365760" cy="365760"/>
           </a:xfrm>
           <a:prstGeom prst="rect">
@@ -3295,7 +3202,7 @@
           <a:bodyPr wrap="square" lIns="0" tIns="0" rIns="0" bIns="0" rtlCol="0" anchor="ctr"/>
           <a:lstStyle/>
           <a:p>
-            <a:pPr algn="ctr" indent="0" marL="0">
+            <a:pPr marL="0" indent="0" algn="ctr">
               <a:buNone/>
             </a:pPr>
             <a:r>
@@ -3307,7 +3214,7 @@
                 <a:ea typeface="Calibri" pitchFamily="34" charset="-122"/>
                 <a:cs typeface="Calibri" pitchFamily="34" charset="-120"/>
               </a:rPr>
-              <a:t>3</a:t>
+              <a:t>4</a:t>
             </a:r>
             <a:endParaRPr lang="en-US" sz="1300" dirty="0"/>
           </a:p>
@@ -3315,13 +3222,13 @@
       </p:sp>
       <p:sp>
         <p:nvSpPr>
-          <p:cNvPr id="22" name="Text 18"/>
-          <p:cNvSpPr/>
-          <p:nvPr/>
-        </p:nvSpPr>
-        <p:spPr>
-          <a:xfrm>
-            <a:off x="5029200" y="3227832"/>
+          <p:cNvPr id="26" name="Text 22"/>
+          <p:cNvSpPr/>
+          <p:nvPr/>
+        </p:nvSpPr>
+        <p:spPr>
+          <a:xfrm>
+            <a:off x="5857875" y="3753612"/>
             <a:ext cx="3657600" cy="274320"/>
           </a:xfrm>
           <a:prstGeom prst="rect">
@@ -3334,7 +3241,7 @@
           <a:bodyPr wrap="square" lIns="0" tIns="0" rIns="0" bIns="0" rtlCol="0" anchor="ctr"/>
           <a:lstStyle/>
           <a:p>
-            <a:pPr indent="0" marL="0">
+            <a:pPr marL="0" indent="0">
               <a:buNone/>
             </a:pPr>
             <a:r>
@@ -3346,7 +3253,7 @@
                 <a:ea typeface="Calibri" pitchFamily="34" charset="-122"/>
                 <a:cs typeface="Calibri" pitchFamily="34" charset="-120"/>
               </a:rPr>
-              <a:t>Learnable Encodings</a:t>
+              <a:t>Transformer Encoder</a:t>
             </a:r>
             <a:endParaRPr lang="en-US" sz="1250" dirty="0"/>
           </a:p>
@@ -3354,26 +3261,26 @@
       </p:sp>
       <p:sp>
         <p:nvSpPr>
-          <p:cNvPr id="23" name="Text 19"/>
-          <p:cNvSpPr/>
-          <p:nvPr/>
-        </p:nvSpPr>
-        <p:spPr>
-          <a:xfrm>
-            <a:off x="5029200" y="3479292"/>
-            <a:ext cx="3657600" cy="310896"/>
-          </a:xfrm>
-          <a:prstGeom prst="rect">
-            <a:avLst/>
-          </a:prstGeom>
-          <a:noFill/>
-          <a:ln/>
-        </p:spPr>
-        <p:txBody>
-          <a:bodyPr wrap="square" lIns="0" tIns="0" rIns="0" bIns="0" rtlCol="0" anchor="ctr"/>
-          <a:lstStyle/>
-          <a:p>
-            <a:pPr indent="0" marL="0">
+          <p:cNvPr id="27" name="Text 23"/>
+          <p:cNvSpPr/>
+          <p:nvPr/>
+        </p:nvSpPr>
+        <p:spPr>
+          <a:xfrm>
+            <a:off x="5857875" y="4005072"/>
+            <a:ext cx="2783205" cy="310896"/>
+          </a:xfrm>
+          <a:prstGeom prst="rect">
+            <a:avLst/>
+          </a:prstGeom>
+          <a:noFill/>
+          <a:ln/>
+        </p:spPr>
+        <p:txBody>
+          <a:bodyPr wrap="square" lIns="0" tIns="0" rIns="0" bIns="0" rtlCol="0" anchor="ctr"/>
+          <a:lstStyle/>
+          <a:p>
+            <a:pPr marL="0" indent="0">
               <a:lnSpc>
                 <a:spcPct val="95000"/>
               </a:lnSpc>
@@ -3388,7 +3295,7 @@
                 <a:ea typeface="Calibri" pitchFamily="34" charset="-122"/>
                 <a:cs typeface="Calibri" pitchFamily="34" charset="-120"/>
               </a:rPr>
-              <a:t>Add hop, relation &amp; group (label) stamps: Xin = Xs+Xh+Xr+Xg.</a:t>
+              <a:t>Multi-head attention re-weights the group vectors.</a:t>
             </a:r>
             <a:endParaRPr lang="en-US" sz="980" dirty="0"/>
           </a:p>
@@ -3396,13 +3303,13 @@
       </p:sp>
       <p:sp>
         <p:nvSpPr>
-          <p:cNvPr id="24" name="Shape 20"/>
-          <p:cNvSpPr/>
-          <p:nvPr/>
-        </p:nvSpPr>
-        <p:spPr>
-          <a:xfrm>
-            <a:off x="4526280" y="3790188"/>
+          <p:cNvPr id="28" name="Shape 24"/>
+          <p:cNvSpPr/>
+          <p:nvPr/>
+        </p:nvSpPr>
+        <p:spPr>
+          <a:xfrm>
+            <a:off x="5354955" y="4315968"/>
             <a:ext cx="365760" cy="365760"/>
           </a:xfrm>
           <a:prstGeom prst="ellipse">
@@ -3413,16 +3320,23 @@
           </a:solidFill>
           <a:ln/>
         </p:spPr>
-      </p:sp>
-      <p:sp>
-        <p:nvSpPr>
-          <p:cNvPr id="25" name="Text 21"/>
-          <p:cNvSpPr/>
-          <p:nvPr/>
-        </p:nvSpPr>
-        <p:spPr>
-          <a:xfrm>
-            <a:off x="4526280" y="3790188"/>
+        <p:txBody>
+          <a:bodyPr/>
+          <a:lstStyle/>
+          <a:p>
+            <a:endParaRPr lang="it-IT"/>
+          </a:p>
+        </p:txBody>
+      </p:sp>
+      <p:sp>
+        <p:nvSpPr>
+          <p:cNvPr id="29" name="Text 25"/>
+          <p:cNvSpPr/>
+          <p:nvPr/>
+        </p:nvSpPr>
+        <p:spPr>
+          <a:xfrm>
+            <a:off x="5354955" y="4315968"/>
             <a:ext cx="365760" cy="365760"/>
           </a:xfrm>
           <a:prstGeom prst="rect">
@@ -3435,7 +3349,7 @@
           <a:bodyPr wrap="square" lIns="0" tIns="0" rIns="0" bIns="0" rtlCol="0" anchor="ctr"/>
           <a:lstStyle/>
           <a:p>
-            <a:pPr algn="ctr" indent="0" marL="0">
+            <a:pPr marL="0" indent="0" algn="ctr">
               <a:buNone/>
             </a:pPr>
             <a:r>
@@ -3447,7 +3361,7 @@
                 <a:ea typeface="Calibri" pitchFamily="34" charset="-122"/>
                 <a:cs typeface="Calibri" pitchFamily="34" charset="-120"/>
               </a:rPr>
-              <a:t>4</a:t>
+              <a:t>5</a:t>
             </a:r>
             <a:endParaRPr lang="en-US" sz="1300" dirty="0"/>
           </a:p>
@@ -3455,13 +3369,13 @@
       </p:sp>
       <p:sp>
         <p:nvSpPr>
-          <p:cNvPr id="26" name="Text 22"/>
-          <p:cNvSpPr/>
-          <p:nvPr/>
-        </p:nvSpPr>
-        <p:spPr>
-          <a:xfrm>
-            <a:off x="5029200" y="3753612"/>
+          <p:cNvPr id="30" name="Text 26"/>
+          <p:cNvSpPr/>
+          <p:nvPr/>
+        </p:nvSpPr>
+        <p:spPr>
+          <a:xfrm>
+            <a:off x="5857875" y="4279392"/>
             <a:ext cx="3657600" cy="274320"/>
           </a:xfrm>
           <a:prstGeom prst="rect">
@@ -3474,7 +3388,7 @@
           <a:bodyPr wrap="square" lIns="0" tIns="0" rIns="0" bIns="0" rtlCol="0" anchor="ctr"/>
           <a:lstStyle/>
           <a:p>
-            <a:pPr indent="0" marL="0">
+            <a:pPr marL="0" indent="0">
               <a:buNone/>
             </a:pPr>
             <a:r>
@@ -3486,7 +3400,7 @@
                 <a:ea typeface="Calibri" pitchFamily="34" charset="-122"/>
                 <a:cs typeface="Calibri" pitchFamily="34" charset="-120"/>
               </a:rPr>
-              <a:t>Transformer Encoder</a:t>
+              <a:t>Inter-Agg. + MLP</a:t>
             </a:r>
             <a:endParaRPr lang="en-US" sz="1250" dirty="0"/>
           </a:p>
@@ -3494,166 +3408,26 @@
       </p:sp>
       <p:sp>
         <p:nvSpPr>
-          <p:cNvPr id="27" name="Text 23"/>
-          <p:cNvSpPr/>
-          <p:nvPr/>
-        </p:nvSpPr>
-        <p:spPr>
-          <a:xfrm>
-            <a:off x="5029200" y="4005072"/>
-            <a:ext cx="3657600" cy="310896"/>
-          </a:xfrm>
-          <a:prstGeom prst="rect">
-            <a:avLst/>
-          </a:prstGeom>
-          <a:noFill/>
-          <a:ln/>
-        </p:spPr>
-        <p:txBody>
-          <a:bodyPr wrap="square" lIns="0" tIns="0" rIns="0" bIns="0" rtlCol="0" anchor="ctr"/>
-          <a:lstStyle/>
-          <a:p>
-            <a:pPr indent="0" marL="0">
-              <a:lnSpc>
-                <a:spcPct val="95000"/>
-              </a:lnSpc>
-              <a:buNone/>
-            </a:pPr>
-            <a:r>
-              <a:rPr lang="en-US" sz="980" dirty="0">
-                <a:solidFill>
-                  <a:srgbClr val="6B7280"/>
-                </a:solidFill>
-                <a:latin typeface="Calibri" pitchFamily="34" charset="0"/>
-                <a:ea typeface="Calibri" pitchFamily="34" charset="-122"/>
-                <a:cs typeface="Calibri" pitchFamily="34" charset="-120"/>
-              </a:rPr>
-              <a:t>Multi-head attention re-weights the group vectors.</a:t>
-            </a:r>
-            <a:endParaRPr lang="en-US" sz="980" dirty="0"/>
-          </a:p>
-        </p:txBody>
-      </p:sp>
-      <p:sp>
-        <p:nvSpPr>
-          <p:cNvPr id="28" name="Shape 24"/>
-          <p:cNvSpPr/>
-          <p:nvPr/>
-        </p:nvSpPr>
-        <p:spPr>
-          <a:xfrm>
-            <a:off x="4526280" y="4315968"/>
-            <a:ext cx="365760" cy="365760"/>
-          </a:xfrm>
-          <a:prstGeom prst="ellipse">
-            <a:avLst/>
-          </a:prstGeom>
-          <a:solidFill>
-            <a:srgbClr val="2F6E80"/>
-          </a:solidFill>
-          <a:ln/>
-        </p:spPr>
-      </p:sp>
-      <p:sp>
-        <p:nvSpPr>
-          <p:cNvPr id="29" name="Text 25"/>
-          <p:cNvSpPr/>
-          <p:nvPr/>
-        </p:nvSpPr>
-        <p:spPr>
-          <a:xfrm>
-            <a:off x="4526280" y="4315968"/>
-            <a:ext cx="365760" cy="365760"/>
-          </a:xfrm>
-          <a:prstGeom prst="rect">
-            <a:avLst/>
-          </a:prstGeom>
-          <a:noFill/>
-          <a:ln/>
-        </p:spPr>
-        <p:txBody>
-          <a:bodyPr wrap="square" lIns="0" tIns="0" rIns="0" bIns="0" rtlCol="0" anchor="ctr"/>
-          <a:lstStyle/>
-          <a:p>
-            <a:pPr algn="ctr" indent="0" marL="0">
-              <a:buNone/>
-            </a:pPr>
-            <a:r>
-              <a:rPr lang="en-US" sz="1300" b="1" dirty="0">
-                <a:solidFill>
-                  <a:srgbClr val="FFFFFF"/>
-                </a:solidFill>
-                <a:latin typeface="Calibri" pitchFamily="34" charset="0"/>
-                <a:ea typeface="Calibri" pitchFamily="34" charset="-122"/>
-                <a:cs typeface="Calibri" pitchFamily="34" charset="-120"/>
-              </a:rPr>
-              <a:t>5</a:t>
-            </a:r>
-            <a:endParaRPr lang="en-US" sz="1300" dirty="0"/>
-          </a:p>
-        </p:txBody>
-      </p:sp>
-      <p:sp>
-        <p:nvSpPr>
-          <p:cNvPr id="30" name="Text 26"/>
-          <p:cNvSpPr/>
-          <p:nvPr/>
-        </p:nvSpPr>
-        <p:spPr>
-          <a:xfrm>
-            <a:off x="5029200" y="4279392"/>
-            <a:ext cx="3657600" cy="274320"/>
-          </a:xfrm>
-          <a:prstGeom prst="rect">
-            <a:avLst/>
-          </a:prstGeom>
-          <a:noFill/>
-          <a:ln/>
-        </p:spPr>
-        <p:txBody>
-          <a:bodyPr wrap="square" lIns="0" tIns="0" rIns="0" bIns="0" rtlCol="0" anchor="ctr"/>
-          <a:lstStyle/>
-          <a:p>
-            <a:pPr indent="0" marL="0">
-              <a:buNone/>
-            </a:pPr>
-            <a:r>
-              <a:rPr lang="en-US" sz="1250" b="1" dirty="0">
-                <a:solidFill>
-                  <a:srgbClr val="1C2B36"/>
-                </a:solidFill>
-                <a:latin typeface="Calibri" pitchFamily="34" charset="0"/>
-                <a:ea typeface="Calibri" pitchFamily="34" charset="-122"/>
-                <a:cs typeface="Calibri" pitchFamily="34" charset="-120"/>
-              </a:rPr>
-              <a:t>Inter-Agg. + MLP</a:t>
-            </a:r>
-            <a:endParaRPr lang="en-US" sz="1250" dirty="0"/>
-          </a:p>
-        </p:txBody>
-      </p:sp>
-      <p:sp>
-        <p:nvSpPr>
           <p:cNvPr id="31" name="Text 27"/>
           <p:cNvSpPr/>
           <p:nvPr/>
         </p:nvSpPr>
         <p:spPr>
           <a:xfrm>
-            <a:off x="5029200" y="4530852"/>
-            <a:ext cx="3657600" cy="310896"/>
-          </a:xfrm>
-          <a:prstGeom prst="rect">
-            <a:avLst/>
-          </a:prstGeom>
-          <a:noFill/>
-          <a:ln/>
-        </p:spPr>
-        <p:txBody>
-          <a:bodyPr wrap="square" lIns="0" tIns="0" rIns="0" bIns="0" rtlCol="0" anchor="ctr"/>
-          <a:lstStyle/>
-          <a:p>
-            <a:pPr indent="0" marL="0">
+            <a:off x="5857875" y="4530852"/>
+            <a:ext cx="2783205" cy="310896"/>
+          </a:xfrm>
+          <a:prstGeom prst="rect">
+            <a:avLst/>
+          </a:prstGeom>
+          <a:noFill/>
+          <a:ln/>
+        </p:spPr>
+        <p:txBody>
+          <a:bodyPr wrap="square" lIns="0" tIns="0" rIns="0" bIns="0" rtlCol="0" anchor="ctr"/>
+          <a:lstStyle/>
+          <a:p>
+            <a:pPr marL="0" indent="0">
               <a:lnSpc>
                 <a:spcPct val="95000"/>
               </a:lnSpc>
@@ -3690,6 +3464,7 @@
         <a:solidFill>
           <a:srgbClr val="F3F2EE"/>
         </a:solidFill>
+        <a:effectLst/>
       </p:bgPr>
     </p:bg>
     <p:spTree>
@@ -3727,11 +3502,11 @@
           <a:bodyPr wrap="square" lIns="0" tIns="0" rIns="0" bIns="0" rtlCol="0" anchor="ctr"/>
           <a:lstStyle/>
           <a:p>
-            <a:pPr indent="0" marL="0">
-              <a:buNone/>
-            </a:pPr>
-            <a:r>
-              <a:rPr lang="en-US" sz="1100" b="1" spc="200" kern="0" dirty="0">
+            <a:pPr marL="0" indent="0">
+              <a:buNone/>
+            </a:pPr>
+            <a:r>
+              <a:rPr lang="en-US" sz="1100" b="1" kern="0" spc="200" dirty="0">
                 <a:solidFill>
                   <a:srgbClr val="2F6E80"/>
                 </a:solidFill>
@@ -3766,7 +3541,7 @@
           <a:bodyPr wrap="square" lIns="0" tIns="0" rIns="0" bIns="0" rtlCol="0" anchor="ctr"/>
           <a:lstStyle/>
           <a:p>
-            <a:pPr indent="0" marL="0">
+            <a:pPr marL="0" indent="0">
               <a:buNone/>
             </a:pPr>
             <a:r>
@@ -3810,13 +3585,20 @@
             <a:prstDash val="solid"/>
           </a:ln>
           <a:effectLst>
-            <a:outerShdw sx="100000" sy="100000" kx="0" ky="0" algn="bl" rotWithShape="0" blurRad="88900" dist="38100" dir="5400000">
+            <a:outerShdw blurRad="88900" dist="38100" dir="5400000" algn="bl" rotWithShape="0">
               <a:srgbClr val="000000">
                 <a:alpha val="12000"/>
               </a:srgbClr>
             </a:outerShdw>
           </a:effectLst>
         </p:spPr>
+        <p:txBody>
+          <a:bodyPr/>
+          <a:lstStyle/>
+          <a:p>
+            <a:endParaRPr lang="it-IT"/>
+          </a:p>
+        </p:txBody>
       </p:sp>
       <p:sp>
         <p:nvSpPr>
@@ -3837,24 +3619,31 @@
           </a:solidFill>
           <a:ln/>
           <a:effectLst>
-            <a:outerShdw sx="100000" sy="100000" kx="0" ky="0" algn="bl" rotWithShape="0" blurRad="88900" dist="38100" dir="5400000">
+            <a:outerShdw blurRad="88900" dist="38100" dir="5400000" algn="bl" rotWithShape="0">
               <a:srgbClr val="000000">
                 <a:alpha val="12000"/>
               </a:srgbClr>
             </a:outerShdw>
           </a:effectLst>
         </p:spPr>
+        <p:txBody>
+          <a:bodyPr/>
+          <a:lstStyle/>
+          <a:p>
+            <a:endParaRPr lang="it-IT"/>
+          </a:p>
+        </p:txBody>
       </p:sp>
       <p:pic>
         <p:nvPicPr>
-          <p:cNvPr id="6" name="Image 0" descr="preencoded.png">    </p:cNvPr>
+          <p:cNvPr id="6" name="Image 0" descr="preencoded.png"/>
           <p:cNvPicPr>
             <a:picLocks noChangeAspect="1"/>
           </p:cNvPicPr>
           <p:nvPr/>
         </p:nvPicPr>
         <p:blipFill>
-          <a:blip r:embed="rId1"/>
+          <a:blip r:embed="rId3"/>
           <a:stretch>
             <a:fillRect/>
           </a:stretch>
@@ -3890,7 +3679,7 @@
           <a:bodyPr wrap="square" lIns="0" tIns="0" rIns="0" bIns="0" rtlCol="0" anchor="ctr"/>
           <a:lstStyle/>
           <a:p>
-            <a:pPr indent="0" marL="0">
+            <a:pPr marL="0" indent="0">
               <a:buNone/>
             </a:pPr>
             <a:r>
@@ -3929,7 +3718,7 @@
           <a:bodyPr wrap="square" lIns="0" tIns="0" rIns="0" bIns="0" rtlCol="0" anchor="ctr"/>
           <a:lstStyle/>
           <a:p>
-            <a:pPr indent="0" marL="0">
+            <a:pPr marL="0" indent="0">
               <a:buNone/>
             </a:pPr>
             <a:r>
@@ -3973,13 +3762,20 @@
             <a:prstDash val="solid"/>
           </a:ln>
           <a:effectLst>
-            <a:outerShdw sx="100000" sy="100000" kx="0" ky="0" algn="bl" rotWithShape="0" blurRad="88900" dist="38100" dir="5400000">
+            <a:outerShdw blurRad="88900" dist="38100" dir="5400000" algn="bl" rotWithShape="0">
               <a:srgbClr val="000000">
                 <a:alpha val="12000"/>
               </a:srgbClr>
             </a:outerShdw>
           </a:effectLst>
         </p:spPr>
+        <p:txBody>
+          <a:bodyPr/>
+          <a:lstStyle/>
+          <a:p>
+            <a:endParaRPr lang="it-IT"/>
+          </a:p>
+        </p:txBody>
       </p:sp>
       <p:sp>
         <p:nvSpPr>
@@ -4000,178 +3796,24 @@
           </a:solidFill>
           <a:ln/>
           <a:effectLst>
-            <a:outerShdw sx="100000" sy="100000" kx="0" ky="0" algn="bl" rotWithShape="0" blurRad="88900" dist="38100" dir="5400000">
+            <a:outerShdw blurRad="88900" dist="38100" dir="5400000" algn="bl" rotWithShape="0">
               <a:srgbClr val="000000">
                 <a:alpha val="12000"/>
               </a:srgbClr>
             </a:outerShdw>
           </a:effectLst>
         </p:spPr>
+        <p:txBody>
+          <a:bodyPr/>
+          <a:lstStyle/>
+          <a:p>
+            <a:endParaRPr lang="it-IT"/>
+          </a:p>
+        </p:txBody>
       </p:sp>
       <p:pic>
         <p:nvPicPr>
-          <p:cNvPr id="11" name="Image 1" descr="preencoded.png">    </p:cNvPr>
-          <p:cNvPicPr>
-            <a:picLocks noChangeAspect="1"/>
-          </p:cNvPicPr>
-          <p:nvPr/>
-        </p:nvPicPr>
-        <p:blipFill>
-          <a:blip r:embed="rId2"/>
-          <a:stretch>
-            <a:fillRect/>
-          </a:stretch>
-        </p:blipFill>
-        <p:spPr>
-          <a:xfrm>
-            <a:off x="5061204" y="1495044"/>
-            <a:ext cx="210312" cy="210312"/>
-          </a:xfrm>
-          <a:prstGeom prst="rect">
-            <a:avLst/>
-          </a:prstGeom>
-        </p:spPr>
-      </p:pic>
-      <p:sp>
-        <p:nvSpPr>
-          <p:cNvPr id="12" name="Text 8"/>
-          <p:cNvSpPr/>
-          <p:nvPr/>
-        </p:nvSpPr>
-        <p:spPr>
-          <a:xfrm>
-            <a:off x="5532120" y="1371600"/>
-            <a:ext cx="2926080" cy="457200"/>
-          </a:xfrm>
-          <a:prstGeom prst="rect">
-            <a:avLst/>
-          </a:prstGeom>
-          <a:noFill/>
-          <a:ln/>
-        </p:spPr>
-        <p:txBody>
-          <a:bodyPr wrap="square" lIns="0" tIns="0" rIns="0" bIns="0" rtlCol="0" anchor="ctr"/>
-          <a:lstStyle/>
-          <a:p>
-            <a:pPr indent="0" marL="0">
-              <a:buNone/>
-            </a:pPr>
-            <a:r>
-              <a:rPr lang="en-US" sz="1600" b="1" dirty="0">
-                <a:solidFill>
-                  <a:srgbClr val="1C2B36"/>
-                </a:solidFill>
-                <a:latin typeface="Cambria" pitchFamily="34" charset="0"/>
-                <a:ea typeface="Cambria" pitchFamily="34" charset="-122"/>
-                <a:cs typeface="Cambria" pitchFamily="34" charset="-120"/>
-              </a:rPr>
-              <a:t>YelpChi</a:t>
-            </a:r>
-            <a:endParaRPr lang="en-US" sz="1600" dirty="0"/>
-          </a:p>
-        </p:txBody>
-      </p:sp>
-      <p:sp>
-        <p:nvSpPr>
-          <p:cNvPr id="13" name="Text 9"/>
-          <p:cNvSpPr/>
-          <p:nvPr/>
-        </p:nvSpPr>
-        <p:spPr>
-          <a:xfrm>
-            <a:off x="4956048" y="1847088"/>
-            <a:ext cx="3566160" cy="384048"/>
-          </a:xfrm>
-          <a:prstGeom prst="rect">
-            <a:avLst/>
-          </a:prstGeom>
-          <a:noFill/>
-          <a:ln/>
-        </p:spPr>
-        <p:txBody>
-          <a:bodyPr wrap="square" lIns="0" tIns="0" rIns="0" bIns="0" rtlCol="0" anchor="ctr"/>
-          <a:lstStyle/>
-          <a:p>
-            <a:pPr indent="0" marL="0">
-              <a:buNone/>
-            </a:pPr>
-            <a:r>
-              <a:rPr lang="en-US" sz="1050" dirty="0">
-                <a:solidFill>
-                  <a:srgbClr val="6B7280"/>
-                </a:solidFill>
-                <a:latin typeface="Calibri" pitchFamily="34" charset="0"/>
-                <a:ea typeface="Calibri" pitchFamily="34" charset="-122"/>
-                <a:cs typeface="Calibri" pitchFamily="34" charset="-120"/>
-              </a:rPr>
-              <a:t>45,954 nodes  ·  3 relations  ·  imbalance 5.9  ·  homophily φ 0.18–0.91</a:t>
-            </a:r>
-            <a:endParaRPr lang="en-US" sz="1050" dirty="0"/>
-          </a:p>
-        </p:txBody>
-      </p:sp>
-      <p:sp>
-        <p:nvSpPr>
-          <p:cNvPr id="14" name="Text 10"/>
-          <p:cNvSpPr/>
-          <p:nvPr/>
-        </p:nvSpPr>
-        <p:spPr>
-          <a:xfrm>
-            <a:off x="502920" y="2487168"/>
-            <a:ext cx="3886200" cy="310896"/>
-          </a:xfrm>
-          <a:prstGeom prst="rect">
-            <a:avLst/>
-          </a:prstGeom>
-          <a:noFill/>
-          <a:ln/>
-        </p:spPr>
-        <p:txBody>
-          <a:bodyPr wrap="square" lIns="0" tIns="0" rIns="0" bIns="0" rtlCol="0" anchor="ctr"/>
-          <a:lstStyle/>
-          <a:p>
-            <a:pPr indent="0" marL="0">
-              <a:buNone/>
-            </a:pPr>
-            <a:r>
-              <a:rPr lang="en-US" sz="1350" b="1" dirty="0">
-                <a:solidFill>
-                  <a:srgbClr val="1C2B36"/>
-                </a:solidFill>
-                <a:latin typeface="Calibri" pitchFamily="34" charset="0"/>
-                <a:ea typeface="Calibri" pitchFamily="34" charset="-122"/>
-                <a:cs typeface="Calibri" pitchFamily="34" charset="-120"/>
-              </a:rPr>
-              <a:t>What I evaluated</a:t>
-            </a:r>
-            <a:endParaRPr lang="en-US" sz="1350" dirty="0"/>
-          </a:p>
-        </p:txBody>
-      </p:sp>
-      <p:sp>
-        <p:nvSpPr>
-          <p:cNvPr id="15" name="Shape 11"/>
-          <p:cNvSpPr/>
-          <p:nvPr/>
-        </p:nvSpPr>
-        <p:spPr>
-          <a:xfrm>
-            <a:off x="548640" y="2871216"/>
-            <a:ext cx="256032" cy="256032"/>
-          </a:xfrm>
-          <a:prstGeom prst="ellipse">
-            <a:avLst/>
-          </a:prstGeom>
-          <a:solidFill>
-            <a:srgbClr val="E9F0F1"/>
-          </a:solidFill>
-          <a:ln/>
-        </p:spPr>
-      </p:sp>
-      <p:pic>
-        <p:nvPicPr>
-          <p:cNvPr id="16" name="Image 2" descr="preencoded.png">    </p:cNvPr>
+          <p:cNvPr id="11" name="Image 1" descr="preencoded.png"/>
           <p:cNvPicPr>
             <a:picLocks noChangeAspect="1"/>
           </p:cNvPicPr>
@@ -4185,8 +3827,8 @@
         </p:blipFill>
         <p:spPr>
           <a:xfrm>
-            <a:off x="603504" y="2926080"/>
-            <a:ext cx="146304" cy="146304"/>
+            <a:off x="5061204" y="1495044"/>
+            <a:ext cx="210312" cy="210312"/>
           </a:xfrm>
           <a:prstGeom prst="rect">
             <a:avLst/>
@@ -4195,72 +3837,130 @@
       </p:pic>
       <p:sp>
         <p:nvSpPr>
-          <p:cNvPr id="17" name="Text 12"/>
-          <p:cNvSpPr/>
-          <p:nvPr/>
-        </p:nvSpPr>
-        <p:spPr>
-          <a:xfrm>
-            <a:off x="914400" y="2816352"/>
-            <a:ext cx="3520440" cy="548640"/>
-          </a:xfrm>
-          <a:prstGeom prst="rect">
-            <a:avLst/>
-          </a:prstGeom>
-          <a:noFill/>
-          <a:ln/>
-        </p:spPr>
-        <p:txBody>
-          <a:bodyPr wrap="square" lIns="0" tIns="0" rIns="0" bIns="0" rtlCol="0" anchor="ctr"/>
-          <a:lstStyle/>
-          <a:p>
-            <a:pPr indent="0" marL="0">
-              <a:lnSpc>
-                <a:spcPct val="98000"/>
-              </a:lnSpc>
-              <a:buNone/>
-            </a:pPr>
-            <a:r>
-              <a:rPr lang="en-US" sz="1050" b="1" dirty="0">
+          <p:cNvPr id="12" name="Text 8"/>
+          <p:cNvSpPr/>
+          <p:nvPr/>
+        </p:nvSpPr>
+        <p:spPr>
+          <a:xfrm>
+            <a:off x="5532120" y="1371600"/>
+            <a:ext cx="2926080" cy="457200"/>
+          </a:xfrm>
+          <a:prstGeom prst="rect">
+            <a:avLst/>
+          </a:prstGeom>
+          <a:noFill/>
+          <a:ln/>
+        </p:spPr>
+        <p:txBody>
+          <a:bodyPr wrap="square" lIns="0" tIns="0" rIns="0" bIns="0" rtlCol="0" anchor="ctr"/>
+          <a:lstStyle/>
+          <a:p>
+            <a:pPr marL="0" indent="0">
+              <a:buNone/>
+            </a:pPr>
+            <a:r>
+              <a:rPr lang="en-US" sz="1600" b="1" dirty="0">
                 <a:solidFill>
                   <a:srgbClr val="1C2B36"/>
+                </a:solidFill>
+                <a:latin typeface="Cambria" pitchFamily="34" charset="0"/>
+                <a:ea typeface="Cambria" pitchFamily="34" charset="-122"/>
+                <a:cs typeface="Cambria" pitchFamily="34" charset="-120"/>
+              </a:rPr>
+              <a:t>YelpChi</a:t>
+            </a:r>
+            <a:endParaRPr lang="en-US" sz="1600" dirty="0"/>
+          </a:p>
+        </p:txBody>
+      </p:sp>
+      <p:sp>
+        <p:nvSpPr>
+          <p:cNvPr id="13" name="Text 9"/>
+          <p:cNvSpPr/>
+          <p:nvPr/>
+        </p:nvSpPr>
+        <p:spPr>
+          <a:xfrm>
+            <a:off x="4956048" y="1847088"/>
+            <a:ext cx="3566160" cy="384048"/>
+          </a:xfrm>
+          <a:prstGeom prst="rect">
+            <a:avLst/>
+          </a:prstGeom>
+          <a:noFill/>
+          <a:ln/>
+        </p:spPr>
+        <p:txBody>
+          <a:bodyPr wrap="square" lIns="0" tIns="0" rIns="0" bIns="0" rtlCol="0" anchor="ctr"/>
+          <a:lstStyle/>
+          <a:p>
+            <a:pPr marL="0" indent="0">
+              <a:buNone/>
+            </a:pPr>
+            <a:r>
+              <a:rPr lang="en-US" sz="1050" dirty="0">
+                <a:solidFill>
+                  <a:srgbClr val="6B7280"/>
                 </a:solidFill>
                 <a:latin typeface="Calibri" pitchFamily="34" charset="0"/>
                 <a:ea typeface="Calibri" pitchFamily="34" charset="-122"/>
                 <a:cs typeface="Calibri" pitchFamily="34" charset="-120"/>
               </a:rPr>
-              <a:t>Component ablation (§5.7.1)  </a:t>
-            </a:r>
-            <a:pPr indent="0" marL="0">
-              <a:lnSpc>
-                <a:spcPct val="98000"/>
-              </a:lnSpc>
-              <a:buNone/>
-            </a:pPr>
-            <a:r>
-              <a:rPr lang="en-US" sz="1050" dirty="0">
-                <a:solidFill>
-                  <a:srgbClr val="6B7280"/>
+              <a:t>45,954 nodes  ·  3 relations  ·  imbalance 5.9  ·  homophily φ 0.18–0.91</a:t>
+            </a:r>
+            <a:endParaRPr lang="en-US" sz="1050" dirty="0"/>
+          </a:p>
+        </p:txBody>
+      </p:sp>
+      <p:sp>
+        <p:nvSpPr>
+          <p:cNvPr id="14" name="Text 10"/>
+          <p:cNvSpPr/>
+          <p:nvPr/>
+        </p:nvSpPr>
+        <p:spPr>
+          <a:xfrm>
+            <a:off x="502920" y="2487168"/>
+            <a:ext cx="3886200" cy="310896"/>
+          </a:xfrm>
+          <a:prstGeom prst="rect">
+            <a:avLst/>
+          </a:prstGeom>
+          <a:noFill/>
+          <a:ln/>
+        </p:spPr>
+        <p:txBody>
+          <a:bodyPr wrap="square" lIns="0" tIns="0" rIns="0" bIns="0" rtlCol="0" anchor="ctr"/>
+          <a:lstStyle/>
+          <a:p>
+            <a:pPr marL="0" indent="0">
+              <a:buNone/>
+            </a:pPr>
+            <a:r>
+              <a:rPr lang="en-US" sz="1350" b="1" dirty="0">
+                <a:solidFill>
+                  <a:srgbClr val="1C2B36"/>
                 </a:solidFill>
                 <a:latin typeface="Calibri" pitchFamily="34" charset="0"/>
                 <a:ea typeface="Calibri" pitchFamily="34" charset="-122"/>
                 <a:cs typeface="Calibri" pitchFamily="34" charset="-120"/>
               </a:rPr>
-              <a:t>GA vs. a plain mean aggregator, plus RNN/LSTM/Transformer backbones.</a:t>
-            </a:r>
-            <a:endParaRPr lang="en-US" sz="1050" dirty="0"/>
-          </a:p>
-        </p:txBody>
-      </p:sp>
-      <p:sp>
-        <p:nvSpPr>
-          <p:cNvPr id="18" name="Shape 13"/>
-          <p:cNvSpPr/>
-          <p:nvPr/>
-        </p:nvSpPr>
-        <p:spPr>
-          <a:xfrm>
-            <a:off x="548640" y="3474720"/>
+              <a:t>What I evaluated</a:t>
+            </a:r>
+            <a:endParaRPr lang="en-US" sz="1350" dirty="0"/>
+          </a:p>
+        </p:txBody>
+      </p:sp>
+      <p:sp>
+        <p:nvSpPr>
+          <p:cNvPr id="15" name="Shape 11"/>
+          <p:cNvSpPr/>
+          <p:nvPr/>
+        </p:nvSpPr>
+        <p:spPr>
+          <a:xfrm>
+            <a:off x="548640" y="2871216"/>
             <a:ext cx="256032" cy="256032"/>
           </a:xfrm>
           <a:prstGeom prst="ellipse">
@@ -4271,10 +3971,17 @@
           </a:solidFill>
           <a:ln/>
         </p:spPr>
+        <p:txBody>
+          <a:bodyPr/>
+          <a:lstStyle/>
+          <a:p>
+            <a:endParaRPr lang="it-IT"/>
+          </a:p>
+        </p:txBody>
       </p:sp>
       <p:pic>
         <p:nvPicPr>
-          <p:cNvPr id="19" name="Image 3" descr="preencoded.png">    </p:cNvPr>
+          <p:cNvPr id="16" name="Image 2" descr="preencoded.png"/>
           <p:cNvPicPr>
             <a:picLocks noChangeAspect="1"/>
           </p:cNvPicPr>
@@ -4288,7 +3995,7 @@
         </p:blipFill>
         <p:spPr>
           <a:xfrm>
-            <a:off x="603504" y="3529584"/>
+            <a:off x="603504" y="2926080"/>
             <a:ext cx="146304" cy="146304"/>
           </a:xfrm>
           <a:prstGeom prst="rect">
@@ -4298,13 +4005,13 @@
       </p:pic>
       <p:sp>
         <p:nvSpPr>
-          <p:cNvPr id="20" name="Text 14"/>
-          <p:cNvSpPr/>
-          <p:nvPr/>
-        </p:nvSpPr>
-        <p:spPr>
-          <a:xfrm>
-            <a:off x="914400" y="3419856"/>
+          <p:cNvPr id="17" name="Text 12"/>
+          <p:cNvSpPr/>
+          <p:nvPr/>
+        </p:nvSpPr>
+        <p:spPr>
+          <a:xfrm>
+            <a:off x="914400" y="2816352"/>
             <a:ext cx="3520440" cy="548640"/>
           </a:xfrm>
           <a:prstGeom prst="rect">
@@ -4317,7 +4024,7 @@
           <a:bodyPr wrap="square" lIns="0" tIns="0" rIns="0" bIns="0" rtlCol="0" anchor="ctr"/>
           <a:lstStyle/>
           <a:p>
-            <a:pPr indent="0" marL="0">
+            <a:pPr marL="0" indent="0">
               <a:lnSpc>
                 <a:spcPct val="98000"/>
               </a:lnSpc>
@@ -4332,23 +4039,121 @@
                 <a:ea typeface="Calibri" pitchFamily="34" charset="-122"/>
                 <a:cs typeface="Calibri" pitchFamily="34" charset="-120"/>
               </a:rPr>
-              <a:t>Encoding ablation (§5.7.2)  </a:t>
-            </a:r>
-            <a:pPr indent="0" marL="0">
+              <a:t>Component ablation (§5.7.1)  </a:t>
+            </a:r>
+            <a:r>
+              <a:rPr lang="en-US" sz="1050" dirty="0">
+                <a:solidFill>
+                  <a:srgbClr val="6B7280"/>
+                </a:solidFill>
+                <a:latin typeface="Calibri" pitchFamily="34" charset="0"/>
+                <a:ea typeface="Calibri" pitchFamily="34" charset="-122"/>
+                <a:cs typeface="Calibri" pitchFamily="34" charset="-120"/>
+              </a:rPr>
+              <a:t>GA vs. a plain mean aggregator, plus RNN/LSTM/Transformer backbones.</a:t>
+            </a:r>
+            <a:endParaRPr lang="en-US" sz="1050" dirty="0"/>
+          </a:p>
+        </p:txBody>
+      </p:sp>
+      <p:sp>
+        <p:nvSpPr>
+          <p:cNvPr id="18" name="Shape 13"/>
+          <p:cNvSpPr/>
+          <p:nvPr/>
+        </p:nvSpPr>
+        <p:spPr>
+          <a:xfrm>
+            <a:off x="548640" y="3474720"/>
+            <a:ext cx="256032" cy="256032"/>
+          </a:xfrm>
+          <a:prstGeom prst="ellipse">
+            <a:avLst/>
+          </a:prstGeom>
+          <a:solidFill>
+            <a:srgbClr val="E9F0F1"/>
+          </a:solidFill>
+          <a:ln/>
+        </p:spPr>
+        <p:txBody>
+          <a:bodyPr/>
+          <a:lstStyle/>
+          <a:p>
+            <a:endParaRPr lang="it-IT"/>
+          </a:p>
+        </p:txBody>
+      </p:sp>
+      <p:pic>
+        <p:nvPicPr>
+          <p:cNvPr id="19" name="Image 3" descr="preencoded.png"/>
+          <p:cNvPicPr>
+            <a:picLocks noChangeAspect="1"/>
+          </p:cNvPicPr>
+          <p:nvPr/>
+        </p:nvPicPr>
+        <p:blipFill>
+          <a:blip r:embed="rId4"/>
+          <a:stretch>
+            <a:fillRect/>
+          </a:stretch>
+        </p:blipFill>
+        <p:spPr>
+          <a:xfrm>
+            <a:off x="603504" y="3529584"/>
+            <a:ext cx="146304" cy="146304"/>
+          </a:xfrm>
+          <a:prstGeom prst="rect">
+            <a:avLst/>
+          </a:prstGeom>
+        </p:spPr>
+      </p:pic>
+      <p:sp>
+        <p:nvSpPr>
+          <p:cNvPr id="20" name="Text 14"/>
+          <p:cNvSpPr/>
+          <p:nvPr/>
+        </p:nvSpPr>
+        <p:spPr>
+          <a:xfrm>
+            <a:off x="914400" y="3419856"/>
+            <a:ext cx="3520440" cy="548640"/>
+          </a:xfrm>
+          <a:prstGeom prst="rect">
+            <a:avLst/>
+          </a:prstGeom>
+          <a:noFill/>
+          <a:ln/>
+        </p:spPr>
+        <p:txBody>
+          <a:bodyPr wrap="square" lIns="0" tIns="0" rIns="0" bIns="0" rtlCol="0" anchor="ctr"/>
+          <a:lstStyle/>
+          <a:p>
+            <a:pPr marL="0" indent="0">
               <a:lnSpc>
                 <a:spcPct val="98000"/>
               </a:lnSpc>
               <a:buNone/>
             </a:pPr>
             <a:r>
-              <a:rPr lang="en-US" sz="1050" dirty="0">
-                <a:solidFill>
-                  <a:srgbClr val="6B7280"/>
+              <a:rPr lang="en-US" sz="1050" b="1" dirty="0">
+                <a:solidFill>
+                  <a:srgbClr val="1C2B36"/>
                 </a:solidFill>
                 <a:latin typeface="Calibri" pitchFamily="34" charset="0"/>
                 <a:ea typeface="Calibri" pitchFamily="34" charset="-122"/>
                 <a:cs typeface="Calibri" pitchFamily="34" charset="-120"/>
               </a:rPr>
+              <a:t>Encoding ablation (§5.7.2)  </a:t>
+            </a:r>
+            <a:r>
+              <a:rPr lang="en-US" sz="1050" dirty="0">
+                <a:solidFill>
+                  <a:srgbClr val="6B7280"/>
+                </a:solidFill>
+                <a:latin typeface="Calibri" pitchFamily="34" charset="0"/>
+                <a:ea typeface="Calibri" pitchFamily="34" charset="-122"/>
+                <a:cs typeface="Calibri" pitchFamily="34" charset="-120"/>
+              </a:rPr>
               <a:t>Isolating the contribution of Xh, Xr and the group encoding Xg.</a:t>
             </a:r>
             <a:endParaRPr lang="en-US" sz="1050" dirty="0"/>
@@ -4374,10 +4179,133 @@
           </a:solidFill>
           <a:ln/>
         </p:spPr>
+        <p:txBody>
+          <a:bodyPr/>
+          <a:lstStyle/>
+          <a:p>
+            <a:endParaRPr lang="it-IT"/>
+          </a:p>
+        </p:txBody>
       </p:sp>
       <p:pic>
         <p:nvPicPr>
-          <p:cNvPr id="22" name="Image 4" descr="preencoded.png">    </p:cNvPr>
+          <p:cNvPr id="22" name="Image 4" descr="preencoded.png"/>
+          <p:cNvPicPr>
+            <a:picLocks noChangeAspect="1"/>
+          </p:cNvPicPr>
+          <p:nvPr/>
+        </p:nvPicPr>
+        <p:blipFill>
+          <a:blip r:embed="rId4"/>
+          <a:stretch>
+            <a:fillRect/>
+          </a:stretch>
+        </p:blipFill>
+        <p:spPr>
+          <a:xfrm>
+            <a:off x="603504" y="4133088"/>
+            <a:ext cx="146304" cy="146304"/>
+          </a:xfrm>
+          <a:prstGeom prst="rect">
+            <a:avLst/>
+          </a:prstGeom>
+        </p:spPr>
+      </p:pic>
+      <p:sp>
+        <p:nvSpPr>
+          <p:cNvPr id="23" name="Text 16"/>
+          <p:cNvSpPr/>
+          <p:nvPr/>
+        </p:nvSpPr>
+        <p:spPr>
+          <a:xfrm>
+            <a:off x="914400" y="4023360"/>
+            <a:ext cx="3520440" cy="548640"/>
+          </a:xfrm>
+          <a:prstGeom prst="rect">
+            <a:avLst/>
+          </a:prstGeom>
+          <a:noFill/>
+          <a:ln/>
+        </p:spPr>
+        <p:txBody>
+          <a:bodyPr wrap="square" lIns="0" tIns="0" rIns="0" bIns="0" rtlCol="0" anchor="ctr"/>
+          <a:lstStyle/>
+          <a:p>
+            <a:pPr marL="0" indent="0">
+              <a:lnSpc>
+                <a:spcPct val="98000"/>
+              </a:lnSpc>
+              <a:buNone/>
+            </a:pPr>
+            <a:r>
+              <a:rPr lang="en-US" sz="1050" b="1" dirty="0">
+                <a:solidFill>
+                  <a:srgbClr val="1C2B36"/>
+                </a:solidFill>
+                <a:latin typeface="Calibri" pitchFamily="34" charset="0"/>
+                <a:ea typeface="Calibri" pitchFamily="34" charset="-122"/>
+                <a:cs typeface="Calibri" pitchFamily="34" charset="-120"/>
+              </a:rPr>
+              <a:t>Parameter analysis (§5.7.3)  </a:t>
+            </a:r>
+            <a:r>
+              <a:rPr lang="en-US" sz="1050" dirty="0">
+                <a:solidFill>
+                  <a:srgbClr val="6B7280"/>
+                </a:solidFill>
+                <a:latin typeface="Calibri" pitchFamily="34" charset="0"/>
+                <a:ea typeface="Calibri" pitchFamily="34" charset="-122"/>
+                <a:cs typeface="Calibri" pitchFamily="34" charset="-120"/>
+              </a:rPr>
+              <a:t>Sensitivity to training-set % and observed-label %.</a:t>
+            </a:r>
+            <a:endParaRPr lang="en-US" sz="1050" dirty="0"/>
+          </a:p>
+        </p:txBody>
+      </p:sp>
+      <p:sp>
+        <p:nvSpPr>
+          <p:cNvPr id="24" name="Text 17"/>
+          <p:cNvSpPr/>
+          <p:nvPr/>
+        </p:nvSpPr>
+        <p:spPr>
+          <a:xfrm>
+            <a:off x="548640" y="4681728"/>
+            <a:ext cx="3931920" cy="274320"/>
+          </a:xfrm>
+          <a:prstGeom prst="rect">
+            <a:avLst/>
+          </a:prstGeom>
+          <a:noFill/>
+          <a:ln/>
+        </p:spPr>
+        <p:txBody>
+          <a:bodyPr wrap="square" lIns="0" tIns="0" rIns="0" bIns="0" rtlCol="0" anchor="ctr"/>
+          <a:lstStyle/>
+          <a:p>
+            <a:pPr marL="0" indent="0">
+              <a:buNone/>
+            </a:pPr>
+            <a:r>
+              <a:rPr lang="en-US" sz="950" i="1" dirty="0">
+                <a:solidFill>
+                  <a:srgbClr val="C04A3B"/>
+                </a:solidFill>
+                <a:latin typeface="Calibri" pitchFamily="34" charset="0"/>
+                <a:ea typeface="Calibri" pitchFamily="34" charset="-122"/>
+                <a:cs typeface="Calibri" pitchFamily="34" charset="-120"/>
+              </a:rPr>
+              <a:t>.</a:t>
+            </a:r>
+            <a:endParaRPr lang="en-US" sz="950" dirty="0"/>
+          </a:p>
+        </p:txBody>
+      </p:sp>
+      <p:pic>
+        <p:nvPicPr>
+          <p:cNvPr id="25" name="Image 5" descr="Per-relation edge homophily ratios for Amazon and YelpChi"/>
           <p:cNvPicPr>
             <a:picLocks noChangeAspect="1"/>
           </p:cNvPicPr>
@@ -4391,128 +4319,6 @@
         </p:blipFill>
         <p:spPr>
           <a:xfrm>
-            <a:off x="603504" y="4133088"/>
-            <a:ext cx="146304" cy="146304"/>
-          </a:xfrm>
-          <a:prstGeom prst="rect">
-            <a:avLst/>
-          </a:prstGeom>
-        </p:spPr>
-      </p:pic>
-      <p:sp>
-        <p:nvSpPr>
-          <p:cNvPr id="23" name="Text 16"/>
-          <p:cNvSpPr/>
-          <p:nvPr/>
-        </p:nvSpPr>
-        <p:spPr>
-          <a:xfrm>
-            <a:off x="914400" y="4023360"/>
-            <a:ext cx="3520440" cy="548640"/>
-          </a:xfrm>
-          <a:prstGeom prst="rect">
-            <a:avLst/>
-          </a:prstGeom>
-          <a:noFill/>
-          <a:ln/>
-        </p:spPr>
-        <p:txBody>
-          <a:bodyPr wrap="square" lIns="0" tIns="0" rIns="0" bIns="0" rtlCol="0" anchor="ctr"/>
-          <a:lstStyle/>
-          <a:p>
-            <a:pPr indent="0" marL="0">
-              <a:lnSpc>
-                <a:spcPct val="98000"/>
-              </a:lnSpc>
-              <a:buNone/>
-            </a:pPr>
-            <a:r>
-              <a:rPr lang="en-US" sz="1050" b="1" dirty="0">
-                <a:solidFill>
-                  <a:srgbClr val="1C2B36"/>
-                </a:solidFill>
-                <a:latin typeface="Calibri" pitchFamily="34" charset="0"/>
-                <a:ea typeface="Calibri" pitchFamily="34" charset="-122"/>
-                <a:cs typeface="Calibri" pitchFamily="34" charset="-120"/>
-              </a:rPr>
-              <a:t>Parameter analysis (§5.7.3)  </a:t>
-            </a:r>
-            <a:pPr indent="0" marL="0">
-              <a:lnSpc>
-                <a:spcPct val="98000"/>
-              </a:lnSpc>
-              <a:buNone/>
-            </a:pPr>
-            <a:r>
-              <a:rPr lang="en-US" sz="1050" dirty="0">
-                <a:solidFill>
-                  <a:srgbClr val="6B7280"/>
-                </a:solidFill>
-                <a:latin typeface="Calibri" pitchFamily="34" charset="0"/>
-                <a:ea typeface="Calibri" pitchFamily="34" charset="-122"/>
-                <a:cs typeface="Calibri" pitchFamily="34" charset="-120"/>
-              </a:rPr>
-              <a:t>Sensitivity to training-set % and observed-label %.</a:t>
-            </a:r>
-            <a:endParaRPr lang="en-US" sz="1050" dirty="0"/>
-          </a:p>
-        </p:txBody>
-      </p:sp>
-      <p:sp>
-        <p:nvSpPr>
-          <p:cNvPr id="24" name="Text 17"/>
-          <p:cNvSpPr/>
-          <p:nvPr/>
-        </p:nvSpPr>
-        <p:spPr>
-          <a:xfrm>
-            <a:off x="548640" y="4681728"/>
-            <a:ext cx="3931920" cy="274320"/>
-          </a:xfrm>
-          <a:prstGeom prst="rect">
-            <a:avLst/>
-          </a:prstGeom>
-          <a:noFill/>
-          <a:ln/>
-        </p:spPr>
-        <p:txBody>
-          <a:bodyPr wrap="square" lIns="0" tIns="0" rIns="0" bIns="0" rtlCol="0" anchor="ctr"/>
-          <a:lstStyle/>
-          <a:p>
-            <a:pPr indent="0" marL="0">
-              <a:buNone/>
-            </a:pPr>
-            <a:r>
-              <a:rPr lang="en-US" sz="950" i="1" dirty="0">
-                <a:solidFill>
-                  <a:srgbClr val="C04A3B"/>
-                </a:solidFill>
-                <a:latin typeface="Calibri" pitchFamily="34" charset="0"/>
-                <a:ea typeface="Calibri" pitchFamily="34" charset="-122"/>
-                <a:cs typeface="Calibri" pitchFamily="34" charset="-120"/>
-              </a:rPr>
-              <a:t>Note: no baseline comparison — the focus is GAGA's own components.</a:t>
-            </a:r>
-            <a:endParaRPr lang="en-US" sz="950" dirty="0"/>
-          </a:p>
-        </p:txBody>
-      </p:sp>
-      <p:pic>
-        <p:nvPicPr>
-          <p:cNvPr id="25" name="Image 5" descr="Per-relation edge homophily ratios for Amazon and YelpChi">    </p:cNvPr>
-          <p:cNvPicPr>
-            <a:picLocks noChangeAspect="1"/>
-          </p:cNvPicPr>
-          <p:nvPr/>
-        </p:nvPicPr>
-        <p:blipFill>
-          <a:blip r:embed="rId6"/>
-          <a:stretch>
-            <a:fillRect/>
-          </a:stretch>
-        </p:blipFill>
-        <p:spPr>
-          <a:xfrm>
             <a:off x="4754880" y="2697480"/>
             <a:ext cx="3886200" cy="1588798"/>
           </a:xfrm>
@@ -4542,7 +4348,7 @@
           <a:bodyPr wrap="square" lIns="0" tIns="0" rIns="0" bIns="0" rtlCol="0" anchor="ctr"/>
           <a:lstStyle/>
           <a:p>
-            <a:pPr algn="ctr" indent="0" marL="0">
+            <a:pPr marL="0" indent="0" algn="ctr">
               <a:lnSpc>
                 <a:spcPct val="100000"/>
               </a:lnSpc>
@@ -4579,6 +4385,7 @@
         <a:solidFill>
           <a:srgbClr val="F3F2EE"/>
         </a:solidFill>
+        <a:effectLst/>
       </p:bgPr>
     </p:bg>
     <p:spTree>
@@ -4616,11 +4423,11 @@
           <a:bodyPr wrap="square" lIns="0" tIns="0" rIns="0" bIns="0" rtlCol="0" anchor="ctr"/>
           <a:lstStyle/>
           <a:p>
-            <a:pPr indent="0" marL="0">
-              <a:buNone/>
-            </a:pPr>
-            <a:r>
-              <a:rPr lang="en-US" sz="1100" b="1" spc="200" kern="0" dirty="0">
+            <a:pPr marL="0" indent="0">
+              <a:buNone/>
+            </a:pPr>
+            <a:r>
+              <a:rPr lang="en-US" sz="1100" b="1" kern="0" spc="200" dirty="0">
                 <a:solidFill>
                   <a:srgbClr val="2F6E80"/>
                 </a:solidFill>
@@ -4655,7 +4462,7 @@
           <a:bodyPr wrap="square" lIns="0" tIns="0" rIns="0" bIns="0" rtlCol="0" anchor="ctr"/>
           <a:lstStyle/>
           <a:p>
-            <a:pPr indent="0" marL="0">
+            <a:pPr marL="0" indent="0">
               <a:buNone/>
             </a:pPr>
             <a:r>
@@ -4675,156 +4482,7 @@
       </p:sp>
       <p:pic>
         <p:nvPicPr>
-          <p:cNvPr id="4" name="Image 0" descr="Ablation of learnable encodings, AUC on YelpChi, with vs without group aggregation">    </p:cNvPr>
-          <p:cNvPicPr>
-            <a:picLocks noChangeAspect="1"/>
-          </p:cNvPicPr>
-          <p:nvPr/>
-        </p:nvPicPr>
-        <p:blipFill>
-          <a:blip r:embed="rId1"/>
-          <a:stretch>
-            <a:fillRect/>
-          </a:stretch>
-        </p:blipFill>
-        <p:spPr>
-          <a:xfrm>
-            <a:off x="457200" y="1234440"/>
-            <a:ext cx="3246120" cy="2271603"/>
-          </a:xfrm>
-          <a:prstGeom prst="rect">
-            <a:avLst/>
-          </a:prstGeom>
-        </p:spPr>
-      </p:pic>
-      <p:sp>
-        <p:nvSpPr>
-          <p:cNvPr id="5" name="Text 2"/>
-          <p:cNvSpPr/>
-          <p:nvPr/>
-        </p:nvSpPr>
-        <p:spPr>
-          <a:xfrm>
-            <a:off x="457200" y="3524331"/>
-            <a:ext cx="3337560" cy="502920"/>
-          </a:xfrm>
-          <a:prstGeom prst="rect">
-            <a:avLst/>
-          </a:prstGeom>
-          <a:noFill/>
-          <a:ln/>
-        </p:spPr>
-        <p:txBody>
-          <a:bodyPr wrap="square" lIns="0" tIns="0" rIns="0" bIns="0" rtlCol="0" anchor="ctr"/>
-          <a:lstStyle/>
-          <a:p>
-            <a:pPr algn="ctr" indent="0" marL="0">
-              <a:lnSpc>
-                <a:spcPct val="100000"/>
-              </a:lnSpc>
-              <a:buNone/>
-            </a:pPr>
-            <a:r>
-              <a:rPr lang="en-US" sz="900" i="1" dirty="0">
-                <a:solidFill>
-                  <a:srgbClr val="6B7280"/>
-                </a:solidFill>
-                <a:latin typeface="Calibri" pitchFamily="34" charset="0"/>
-                <a:ea typeface="Calibri" pitchFamily="34" charset="-122"/>
-                <a:cs typeface="Calibri" pitchFamily="34" charset="-120"/>
-              </a:rPr>
-              <a:t>Encoding ablation (YelpChi AUC). Full model in red; group encoding Xg is the strongest single encoding.</a:t>
-            </a:r>
-            <a:endParaRPr lang="en-US" sz="900" dirty="0"/>
-          </a:p>
-        </p:txBody>
-      </p:sp>
-      <p:pic>
-        <p:nvPicPr>
-          <p:cNvPr id="6" name="Image 1" descr="Sensitivity of AUC and AP to label rate and to training-set size on YelpChi">    </p:cNvPr>
-          <p:cNvPicPr>
-            <a:picLocks noChangeAspect="1"/>
-          </p:cNvPicPr>
-          <p:nvPr/>
-        </p:nvPicPr>
-        <p:blipFill>
-          <a:blip r:embed="rId2"/>
-          <a:stretch>
-            <a:fillRect/>
-          </a:stretch>
-        </p:blipFill>
-        <p:spPr>
-          <a:xfrm>
-            <a:off x="3977640" y="1234440"/>
-            <a:ext cx="4526280" cy="1904199"/>
-          </a:xfrm>
-          <a:prstGeom prst="rect">
-            <a:avLst/>
-          </a:prstGeom>
-        </p:spPr>
-      </p:pic>
-      <p:sp>
-        <p:nvSpPr>
-          <p:cNvPr id="7" name="Text 3"/>
-          <p:cNvSpPr/>
-          <p:nvPr/>
-        </p:nvSpPr>
-        <p:spPr>
-          <a:xfrm>
-            <a:off x="3977640" y="3138639"/>
-            <a:ext cx="4526280" cy="274320"/>
-          </a:xfrm>
-          <a:prstGeom prst="rect">
-            <a:avLst/>
-          </a:prstGeom>
-          <a:noFill/>
-          <a:ln/>
-        </p:spPr>
-        <p:txBody>
-          <a:bodyPr wrap="square" lIns="0" tIns="0" rIns="0" bIns="0" rtlCol="0" anchor="ctr"/>
-          <a:lstStyle/>
-          <a:p>
-            <a:pPr algn="ctr" indent="0" marL="0">
-              <a:buNone/>
-            </a:pPr>
-            <a:r>
-              <a:rPr lang="en-US" sz="900" i="1" dirty="0">
-                <a:solidFill>
-                  <a:srgbClr val="6B7280"/>
-                </a:solidFill>
-                <a:latin typeface="Calibri" pitchFamily="34" charset="0"/>
-                <a:ea typeface="Calibri" pitchFamily="34" charset="-122"/>
-                <a:cs typeface="Calibri" pitchFamily="34" charset="-120"/>
-              </a:rPr>
-              <a:t>Sensitivity analysis (YelpChi). GAGA stays strong as labels/data shrink.</a:t>
-            </a:r>
-            <a:endParaRPr lang="en-US" sz="900" dirty="0"/>
-          </a:p>
-        </p:txBody>
-      </p:sp>
-      <p:sp>
-        <p:nvSpPr>
-          <p:cNvPr id="8" name="Shape 4"/>
-          <p:cNvSpPr/>
-          <p:nvPr/>
-        </p:nvSpPr>
-        <p:spPr>
-          <a:xfrm>
-            <a:off x="4023360" y="3310128"/>
-            <a:ext cx="237744" cy="237744"/>
-          </a:xfrm>
-          <a:prstGeom prst="ellipse">
-            <a:avLst/>
-          </a:prstGeom>
-          <a:solidFill>
-            <a:srgbClr val="C04A3B"/>
-          </a:solidFill>
-          <a:ln/>
-        </p:spPr>
-      </p:sp>
-      <p:pic>
-        <p:nvPicPr>
-          <p:cNvPr id="9" name="Image 2" descr="preencoded.png">    </p:cNvPr>
+          <p:cNvPr id="4" name="Image 0" descr="Ablation of learnable encodings, AUC on YelpChi, with vs without group aggregation"/>
           <p:cNvPicPr>
             <a:picLocks noChangeAspect="1"/>
           </p:cNvPicPr>
@@ -4838,8 +4496,8 @@
         </p:blipFill>
         <p:spPr>
           <a:xfrm>
-            <a:off x="4078224" y="3364992"/>
-            <a:ext cx="128016" cy="128016"/>
+            <a:off x="457200" y="1234440"/>
+            <a:ext cx="3246120" cy="2271603"/>
           </a:xfrm>
           <a:prstGeom prst="rect">
             <a:avLst/>
@@ -4848,66 +4506,49 @@
       </p:pic>
       <p:sp>
         <p:nvSpPr>
-          <p:cNvPr id="10" name="Text 5"/>
-          <p:cNvSpPr/>
-          <p:nvPr/>
-        </p:nvSpPr>
-        <p:spPr>
-          <a:xfrm>
-            <a:off x="4389120" y="3246120"/>
-            <a:ext cx="4069080" cy="365760"/>
-          </a:xfrm>
-          <a:prstGeom prst="rect">
-            <a:avLst/>
-          </a:prstGeom>
-          <a:noFill/>
-          <a:ln/>
-        </p:spPr>
-        <p:txBody>
-          <a:bodyPr wrap="square" lIns="0" tIns="0" rIns="0" bIns="0" rtlCol="0" anchor="ctr"/>
-          <a:lstStyle/>
-          <a:p>
-            <a:pPr indent="0" marL="0">
-              <a:buNone/>
-            </a:pPr>
-            <a:r>
-              <a:rPr lang="en-US" sz="1100" dirty="0">
-                <a:solidFill>
-                  <a:srgbClr val="1C2B36"/>
+          <p:cNvPr id="5" name="Text 2"/>
+          <p:cNvSpPr/>
+          <p:nvPr/>
+        </p:nvSpPr>
+        <p:spPr>
+          <a:xfrm>
+            <a:off x="457200" y="3524331"/>
+            <a:ext cx="3337560" cy="502920"/>
+          </a:xfrm>
+          <a:prstGeom prst="rect">
+            <a:avLst/>
+          </a:prstGeom>
+          <a:noFill/>
+          <a:ln/>
+        </p:spPr>
+        <p:txBody>
+          <a:bodyPr wrap="square" lIns="0" tIns="0" rIns="0" bIns="0" rtlCol="0" anchor="ctr"/>
+          <a:lstStyle/>
+          <a:p>
+            <a:pPr marL="0" indent="0" algn="ctr">
+              <a:lnSpc>
+                <a:spcPct val="100000"/>
+              </a:lnSpc>
+              <a:buNone/>
+            </a:pPr>
+            <a:r>
+              <a:rPr lang="en-US" sz="900" i="1" dirty="0">
+                <a:solidFill>
+                  <a:srgbClr val="6B7280"/>
                 </a:solidFill>
                 <a:latin typeface="Calibri" pitchFamily="34" charset="0"/>
                 <a:ea typeface="Calibri" pitchFamily="34" charset="-122"/>
                 <a:cs typeface="Calibri" pitchFamily="34" charset="-120"/>
               </a:rPr>
-              <a:t>Full model — best AUC 0.944 on YelpChi.</a:t>
-            </a:r>
-            <a:endParaRPr lang="en-US" sz="1100" dirty="0"/>
-          </a:p>
-        </p:txBody>
-      </p:sp>
-      <p:sp>
-        <p:nvSpPr>
-          <p:cNvPr id="11" name="Shape 6"/>
-          <p:cNvSpPr/>
-          <p:nvPr/>
-        </p:nvSpPr>
-        <p:spPr>
-          <a:xfrm>
-            <a:off x="4023360" y="3767328"/>
-            <a:ext cx="237744" cy="237744"/>
-          </a:xfrm>
-          <a:prstGeom prst="ellipse">
-            <a:avLst/>
-          </a:prstGeom>
-          <a:solidFill>
-            <a:srgbClr val="C04A3B"/>
-          </a:solidFill>
-          <a:ln/>
-        </p:spPr>
+              <a:t>Encoding ablation (YelpChi AUC). Full model in red; group encoding Xg is the strongest single encoding.</a:t>
+            </a:r>
+            <a:endParaRPr lang="en-US" sz="900" dirty="0"/>
+          </a:p>
+        </p:txBody>
       </p:sp>
       <p:pic>
         <p:nvPicPr>
-          <p:cNvPr id="12" name="Image 3" descr="preencoded.png">    </p:cNvPr>
+          <p:cNvPr id="6" name="Image 1" descr="Sensitivity of AUC and AP to label rate and to training-set size on YelpChi"/>
           <p:cNvPicPr>
             <a:picLocks noChangeAspect="1"/>
           </p:cNvPicPr>
@@ -4921,8 +4562,8 @@
         </p:blipFill>
         <p:spPr>
           <a:xfrm>
-            <a:off x="4078224" y="3822192"/>
-            <a:ext cx="128016" cy="128016"/>
+            <a:off x="3977640" y="1234440"/>
+            <a:ext cx="4526280" cy="1904199"/>
           </a:xfrm>
           <a:prstGeom prst="rect">
             <a:avLst/>
@@ -4931,52 +4572,52 @@
       </p:pic>
       <p:sp>
         <p:nvSpPr>
-          <p:cNvPr id="13" name="Text 7"/>
-          <p:cNvSpPr/>
-          <p:nvPr/>
-        </p:nvSpPr>
-        <p:spPr>
-          <a:xfrm>
-            <a:off x="4389120" y="3703320"/>
-            <a:ext cx="4069080" cy="365760"/>
-          </a:xfrm>
-          <a:prstGeom prst="rect">
-            <a:avLst/>
-          </a:prstGeom>
-          <a:noFill/>
-          <a:ln/>
-        </p:spPr>
-        <p:txBody>
-          <a:bodyPr wrap="square" lIns="0" tIns="0" rIns="0" bIns="0" rtlCol="0" anchor="ctr"/>
-          <a:lstStyle/>
-          <a:p>
-            <a:pPr indent="0" marL="0">
-              <a:buNone/>
-            </a:pPr>
-            <a:r>
-              <a:rPr lang="en-US" sz="1100" dirty="0">
-                <a:solidFill>
-                  <a:srgbClr val="1C2B36"/>
+          <p:cNvPr id="7" name="Text 3"/>
+          <p:cNvSpPr/>
+          <p:nvPr/>
+        </p:nvSpPr>
+        <p:spPr>
+          <a:xfrm>
+            <a:off x="3977640" y="3138639"/>
+            <a:ext cx="4526280" cy="274320"/>
+          </a:xfrm>
+          <a:prstGeom prst="rect">
+            <a:avLst/>
+          </a:prstGeom>
+          <a:noFill/>
+          <a:ln/>
+        </p:spPr>
+        <p:txBody>
+          <a:bodyPr wrap="square" lIns="0" tIns="0" rIns="0" bIns="0" rtlCol="0" anchor="ctr"/>
+          <a:lstStyle/>
+          <a:p>
+            <a:pPr marL="0" indent="0" algn="ctr">
+              <a:buNone/>
+            </a:pPr>
+            <a:r>
+              <a:rPr lang="en-US" sz="900" i="1" dirty="0">
+                <a:solidFill>
+                  <a:srgbClr val="6B7280"/>
                 </a:solidFill>
                 <a:latin typeface="Calibri" pitchFamily="34" charset="0"/>
                 <a:ea typeface="Calibri" pitchFamily="34" charset="-122"/>
                 <a:cs typeface="Calibri" pitchFamily="34" charset="-120"/>
               </a:rPr>
-              <a:t>Group encoding Xg alone: +3.4 AUC pts over no encoding.</a:t>
-            </a:r>
-            <a:endParaRPr lang="en-US" sz="1100" dirty="0"/>
-          </a:p>
-        </p:txBody>
-      </p:sp>
-      <p:sp>
-        <p:nvSpPr>
-          <p:cNvPr id="14" name="Shape 8"/>
-          <p:cNvSpPr/>
-          <p:nvPr/>
-        </p:nvSpPr>
-        <p:spPr>
-          <a:xfrm>
-            <a:off x="4023360" y="4224528"/>
+              <a:t>Sensitivity analysis (YelpChi). GAGA stays strong as labels/data shrink.</a:t>
+            </a:r>
+            <a:endParaRPr lang="en-US" sz="900" dirty="0"/>
+          </a:p>
+        </p:txBody>
+      </p:sp>
+      <p:sp>
+        <p:nvSpPr>
+          <p:cNvPr id="8" name="Shape 4"/>
+          <p:cNvSpPr/>
+          <p:nvPr/>
+        </p:nvSpPr>
+        <p:spPr>
+          <a:xfrm>
+            <a:off x="4023360" y="3310128"/>
             <a:ext cx="237744" cy="237744"/>
           </a:xfrm>
           <a:prstGeom prst="ellipse">
@@ -4987,10 +4628,17 @@
           </a:solidFill>
           <a:ln/>
         </p:spPr>
+        <p:txBody>
+          <a:bodyPr/>
+          <a:lstStyle/>
+          <a:p>
+            <a:endParaRPr lang="it-IT"/>
+          </a:p>
+        </p:txBody>
       </p:sp>
       <p:pic>
         <p:nvPicPr>
-          <p:cNvPr id="15" name="Image 4" descr="preencoded.png">    </p:cNvPr>
+          <p:cNvPr id="9" name="Image 2" descr="preencoded.png"/>
           <p:cNvPicPr>
             <a:picLocks noChangeAspect="1"/>
           </p:cNvPicPr>
@@ -5004,6 +4652,186 @@
         </p:blipFill>
         <p:spPr>
           <a:xfrm>
+            <a:off x="4078224" y="3364992"/>
+            <a:ext cx="128016" cy="128016"/>
+          </a:xfrm>
+          <a:prstGeom prst="rect">
+            <a:avLst/>
+          </a:prstGeom>
+        </p:spPr>
+      </p:pic>
+      <p:sp>
+        <p:nvSpPr>
+          <p:cNvPr id="10" name="Text 5"/>
+          <p:cNvSpPr/>
+          <p:nvPr/>
+        </p:nvSpPr>
+        <p:spPr>
+          <a:xfrm>
+            <a:off x="4389120" y="3246120"/>
+            <a:ext cx="4069080" cy="365760"/>
+          </a:xfrm>
+          <a:prstGeom prst="rect">
+            <a:avLst/>
+          </a:prstGeom>
+          <a:noFill/>
+          <a:ln/>
+        </p:spPr>
+        <p:txBody>
+          <a:bodyPr wrap="square" lIns="0" tIns="0" rIns="0" bIns="0" rtlCol="0" anchor="ctr"/>
+          <a:lstStyle/>
+          <a:p>
+            <a:pPr marL="0" indent="0">
+              <a:buNone/>
+            </a:pPr>
+            <a:r>
+              <a:rPr lang="en-US" sz="1100" dirty="0">
+                <a:solidFill>
+                  <a:srgbClr val="1C2B36"/>
+                </a:solidFill>
+                <a:latin typeface="Calibri" pitchFamily="34" charset="0"/>
+                <a:ea typeface="Calibri" pitchFamily="34" charset="-122"/>
+                <a:cs typeface="Calibri" pitchFamily="34" charset="-120"/>
+              </a:rPr>
+              <a:t>Full model — best AUC 0.944 on YelpChi.</a:t>
+            </a:r>
+            <a:endParaRPr lang="en-US" sz="1100" dirty="0"/>
+          </a:p>
+        </p:txBody>
+      </p:sp>
+      <p:sp>
+        <p:nvSpPr>
+          <p:cNvPr id="11" name="Shape 6"/>
+          <p:cNvSpPr/>
+          <p:nvPr/>
+        </p:nvSpPr>
+        <p:spPr>
+          <a:xfrm>
+            <a:off x="4023360" y="3767328"/>
+            <a:ext cx="237744" cy="237744"/>
+          </a:xfrm>
+          <a:prstGeom prst="ellipse">
+            <a:avLst/>
+          </a:prstGeom>
+          <a:solidFill>
+            <a:srgbClr val="C04A3B"/>
+          </a:solidFill>
+          <a:ln/>
+        </p:spPr>
+        <p:txBody>
+          <a:bodyPr/>
+          <a:lstStyle/>
+          <a:p>
+            <a:endParaRPr lang="it-IT"/>
+          </a:p>
+        </p:txBody>
+      </p:sp>
+      <p:pic>
+        <p:nvPicPr>
+          <p:cNvPr id="12" name="Image 3" descr="preencoded.png"/>
+          <p:cNvPicPr>
+            <a:picLocks noChangeAspect="1"/>
+          </p:cNvPicPr>
+          <p:nvPr/>
+        </p:nvPicPr>
+        <p:blipFill>
+          <a:blip r:embed="rId5"/>
+          <a:stretch>
+            <a:fillRect/>
+          </a:stretch>
+        </p:blipFill>
+        <p:spPr>
+          <a:xfrm>
+            <a:off x="4078224" y="3822192"/>
+            <a:ext cx="128016" cy="128016"/>
+          </a:xfrm>
+          <a:prstGeom prst="rect">
+            <a:avLst/>
+          </a:prstGeom>
+        </p:spPr>
+      </p:pic>
+      <p:sp>
+        <p:nvSpPr>
+          <p:cNvPr id="13" name="Text 7"/>
+          <p:cNvSpPr/>
+          <p:nvPr/>
+        </p:nvSpPr>
+        <p:spPr>
+          <a:xfrm>
+            <a:off x="4389120" y="3703320"/>
+            <a:ext cx="4069080" cy="365760"/>
+          </a:xfrm>
+          <a:prstGeom prst="rect">
+            <a:avLst/>
+          </a:prstGeom>
+          <a:noFill/>
+          <a:ln/>
+        </p:spPr>
+        <p:txBody>
+          <a:bodyPr wrap="square" lIns="0" tIns="0" rIns="0" bIns="0" rtlCol="0" anchor="ctr"/>
+          <a:lstStyle/>
+          <a:p>
+            <a:pPr marL="0" indent="0">
+              <a:buNone/>
+            </a:pPr>
+            <a:r>
+              <a:rPr lang="en-US" sz="1100" dirty="0">
+                <a:solidFill>
+                  <a:srgbClr val="1C2B36"/>
+                </a:solidFill>
+                <a:latin typeface="Calibri" pitchFamily="34" charset="0"/>
+                <a:ea typeface="Calibri" pitchFamily="34" charset="-122"/>
+                <a:cs typeface="Calibri" pitchFamily="34" charset="-120"/>
+              </a:rPr>
+              <a:t>Group encoding Xg alone: +3.4 AUC pts over no encoding.</a:t>
+            </a:r>
+            <a:endParaRPr lang="en-US" sz="1100" dirty="0"/>
+          </a:p>
+        </p:txBody>
+      </p:sp>
+      <p:sp>
+        <p:nvSpPr>
+          <p:cNvPr id="14" name="Shape 8"/>
+          <p:cNvSpPr/>
+          <p:nvPr/>
+        </p:nvSpPr>
+        <p:spPr>
+          <a:xfrm>
+            <a:off x="4023360" y="4224528"/>
+            <a:ext cx="237744" cy="237744"/>
+          </a:xfrm>
+          <a:prstGeom prst="ellipse">
+            <a:avLst/>
+          </a:prstGeom>
+          <a:solidFill>
+            <a:srgbClr val="C04A3B"/>
+          </a:solidFill>
+          <a:ln/>
+        </p:spPr>
+        <p:txBody>
+          <a:bodyPr/>
+          <a:lstStyle/>
+          <a:p>
+            <a:endParaRPr lang="it-IT"/>
+          </a:p>
+        </p:txBody>
+      </p:sp>
+      <p:pic>
+        <p:nvPicPr>
+          <p:cNvPr id="15" name="Image 4" descr="preencoded.png"/>
+          <p:cNvPicPr>
+            <a:picLocks noChangeAspect="1"/>
+          </p:cNvPicPr>
+          <p:nvPr/>
+        </p:nvPicPr>
+        <p:blipFill>
+          <a:blip r:embed="rId5"/>
+          <a:stretch>
+            <a:fillRect/>
+          </a:stretch>
+        </p:blipFill>
+        <p:spPr>
+          <a:xfrm>
             <a:off x="4078224" y="4279392"/>
             <a:ext cx="128016" cy="128016"/>
           </a:xfrm>
@@ -5033,7 +4861,7 @@
           <a:bodyPr wrap="square" lIns="0" tIns="0" rIns="0" bIns="0" rtlCol="0" anchor="ctr"/>
           <a:lstStyle/>
           <a:p>
-            <a:pPr indent="0" marL="0">
+            <a:pPr marL="0" indent="0">
               <a:buNone/>
             </a:pPr>
             <a:r>
@@ -5067,6 +4895,7 @@
         <a:solidFill>
           <a:srgbClr val="F3F2EE"/>
         </a:solidFill>
+        <a:effectLst/>
       </p:bgPr>
     </p:bg>
     <p:spTree>
@@ -5104,11 +4933,11 @@
           <a:bodyPr wrap="square" lIns="0" tIns="0" rIns="0" bIns="0" rtlCol="0" anchor="ctr"/>
           <a:lstStyle/>
           <a:p>
-            <a:pPr indent="0" marL="0">
-              <a:buNone/>
-            </a:pPr>
-            <a:r>
-              <a:rPr lang="en-US" sz="1100" b="1" spc="200" kern="0" dirty="0">
+            <a:pPr marL="0" indent="0">
+              <a:buNone/>
+            </a:pPr>
+            <a:r>
+              <a:rPr lang="en-US" sz="1100" b="1" kern="0" spc="200" dirty="0">
                 <a:solidFill>
                   <a:srgbClr val="2F6E80"/>
                 </a:solidFill>
@@ -5143,7 +4972,7 @@
           <a:bodyPr wrap="square" lIns="0" tIns="0" rIns="0" bIns="0" rtlCol="0" anchor="ctr"/>
           <a:lstStyle/>
           <a:p>
-            <a:pPr indent="0" marL="0">
+            <a:pPr marL="0" indent="0">
               <a:buNone/>
             </a:pPr>
             <a:r>
@@ -5187,13 +5016,20 @@
             <a:prstDash val="solid"/>
           </a:ln>
           <a:effectLst>
-            <a:outerShdw sx="100000" sy="100000" kx="0" ky="0" algn="bl" rotWithShape="0" blurRad="88900" dist="38100" dir="5400000">
+            <a:outerShdw blurRad="88900" dist="38100" dir="5400000" algn="bl" rotWithShape="0">
               <a:srgbClr val="000000">
                 <a:alpha val="12000"/>
               </a:srgbClr>
             </a:outerShdw>
           </a:effectLst>
         </p:spPr>
+        <p:txBody>
+          <a:bodyPr/>
+          <a:lstStyle/>
+          <a:p>
+            <a:endParaRPr lang="it-IT"/>
+          </a:p>
+        </p:txBody>
       </p:sp>
       <p:sp>
         <p:nvSpPr>
@@ -5216,7 +5052,7 @@
           <a:bodyPr wrap="square" lIns="0" tIns="0" rIns="0" bIns="0" rtlCol="0" anchor="ctr"/>
           <a:lstStyle/>
           <a:p>
-            <a:pPr indent="0" marL="0">
+            <a:pPr marL="0" indent="0">
               <a:lnSpc>
                 <a:spcPct val="100000"/>
               </a:lnSpc>
@@ -5233,12 +5069,6 @@
               </a:rPr>
               <a:t>Removing group aggregation costs  </a:t>
             </a:r>
-            <a:pPr indent="0" marL="0">
-              <a:lnSpc>
-                <a:spcPct val="100000"/>
-              </a:lnSpc>
-              <a:buNone/>
-            </a:pPr>
             <a:r>
               <a:rPr lang="en-US" sz="1500" b="1" dirty="0">
                 <a:solidFill>
@@ -5250,12 +5080,6 @@
               </a:rPr>
               <a:t>−3.8% AUC</a:t>
             </a:r>
-            <a:pPr indent="0" marL="0">
-              <a:lnSpc>
-                <a:spcPct val="100000"/>
-              </a:lnSpc>
-              <a:buNone/>
-            </a:pPr>
             <a:r>
               <a:rPr lang="en-US" sz="1500" dirty="0">
                 <a:solidFill>
@@ -5267,12 +5091,6 @@
               </a:rPr>
               <a:t>  and  </a:t>
             </a:r>
-            <a:pPr indent="0" marL="0">
-              <a:lnSpc>
-                <a:spcPct val="100000"/>
-              </a:lnSpc>
-              <a:buNone/>
-            </a:pPr>
             <a:r>
               <a:rPr lang="en-US" sz="1500" b="1" dirty="0">
                 <a:solidFill>
@@ -5284,12 +5102,6 @@
               </a:rPr>
               <a:t>−12.9% AP</a:t>
             </a:r>
-            <a:pPr indent="0" marL="0">
-              <a:lnSpc>
-                <a:spcPct val="100000"/>
-              </a:lnSpc>
-              <a:buNone/>
-            </a:pPr>
             <a:r>
               <a:rPr lang="en-US" sz="1500" dirty="0">
                 <a:solidFill>
@@ -5331,13 +5143,20 @@
             <a:prstDash val="solid"/>
           </a:ln>
           <a:effectLst>
-            <a:outerShdw sx="100000" sy="100000" kx="0" ky="0" algn="bl" rotWithShape="0" blurRad="88900" dist="38100" dir="5400000">
+            <a:outerShdw blurRad="88900" dist="38100" dir="5400000" algn="bl" rotWithShape="0">
               <a:srgbClr val="000000">
                 <a:alpha val="12000"/>
               </a:srgbClr>
             </a:outerShdw>
           </a:effectLst>
         </p:spPr>
+        <p:txBody>
+          <a:bodyPr/>
+          <a:lstStyle/>
+          <a:p>
+            <a:endParaRPr lang="it-IT"/>
+          </a:p>
+        </p:txBody>
       </p:sp>
       <p:sp>
         <p:nvSpPr>
@@ -5358,24 +5177,31 @@
           </a:solidFill>
           <a:ln/>
           <a:effectLst>
-            <a:outerShdw sx="100000" sy="100000" kx="0" ky="0" algn="bl" rotWithShape="0" blurRad="88900" dist="38100" dir="5400000">
+            <a:outerShdw blurRad="88900" dist="38100" dir="5400000" algn="bl" rotWithShape="0">
               <a:srgbClr val="000000">
                 <a:alpha val="12000"/>
               </a:srgbClr>
             </a:outerShdw>
           </a:effectLst>
         </p:spPr>
+        <p:txBody>
+          <a:bodyPr/>
+          <a:lstStyle/>
+          <a:p>
+            <a:endParaRPr lang="it-IT"/>
+          </a:p>
+        </p:txBody>
       </p:sp>
       <p:pic>
         <p:nvPicPr>
-          <p:cNvPr id="8" name="Image 0" descr="preencoded.png">    </p:cNvPr>
+          <p:cNvPr id="8" name="Image 0" descr="preencoded.png"/>
           <p:cNvPicPr>
             <a:picLocks noChangeAspect="1"/>
           </p:cNvPicPr>
           <p:nvPr/>
         </p:nvPicPr>
         <p:blipFill>
-          <a:blip r:embed="rId1"/>
+          <a:blip r:embed="rId3"/>
           <a:stretch>
             <a:fillRect/>
           </a:stretch>
@@ -5411,7 +5237,7 @@
           <a:bodyPr wrap="square" lIns="0" tIns="0" rIns="0" bIns="0" rtlCol="0" anchor="ctr"/>
           <a:lstStyle/>
           <a:p>
-            <a:pPr indent="0" marL="0">
+            <a:pPr marL="0" indent="0">
               <a:buNone/>
             </a:pPr>
             <a:r>
@@ -5450,7 +5276,7 @@
           <a:bodyPr wrap="square" lIns="0" tIns="0" rIns="0" bIns="0" rtlCol="0" anchor="ctr"/>
           <a:lstStyle/>
           <a:p>
-            <a:pPr indent="0" marL="0">
+            <a:pPr marL="0" indent="0">
               <a:lnSpc>
                 <a:spcPct val="104000"/>
               </a:lnSpc>
@@ -5497,13 +5323,20 @@
             <a:prstDash val="solid"/>
           </a:ln>
           <a:effectLst>
-            <a:outerShdw sx="100000" sy="100000" kx="0" ky="0" algn="bl" rotWithShape="0" blurRad="88900" dist="38100" dir="5400000">
+            <a:outerShdw blurRad="88900" dist="38100" dir="5400000" algn="bl" rotWithShape="0">
               <a:srgbClr val="000000">
                 <a:alpha val="12000"/>
               </a:srgbClr>
             </a:outerShdw>
           </a:effectLst>
         </p:spPr>
+        <p:txBody>
+          <a:bodyPr/>
+          <a:lstStyle/>
+          <a:p>
+            <a:endParaRPr lang="it-IT"/>
+          </a:p>
+        </p:txBody>
       </p:sp>
       <p:sp>
         <p:nvSpPr>
@@ -5524,24 +5357,31 @@
           </a:solidFill>
           <a:ln/>
           <a:effectLst>
-            <a:outerShdw sx="100000" sy="100000" kx="0" ky="0" algn="bl" rotWithShape="0" blurRad="88900" dist="38100" dir="5400000">
+            <a:outerShdw blurRad="88900" dist="38100" dir="5400000" algn="bl" rotWithShape="0">
               <a:srgbClr val="000000">
                 <a:alpha val="12000"/>
               </a:srgbClr>
             </a:outerShdw>
           </a:effectLst>
         </p:spPr>
+        <p:txBody>
+          <a:bodyPr/>
+          <a:lstStyle/>
+          <a:p>
+            <a:endParaRPr lang="it-IT"/>
+          </a:p>
+        </p:txBody>
       </p:sp>
       <p:pic>
         <p:nvPicPr>
-          <p:cNvPr id="13" name="Image 1" descr="preencoded.png">    </p:cNvPr>
+          <p:cNvPr id="13" name="Image 1" descr="preencoded.png"/>
           <p:cNvPicPr>
             <a:picLocks noChangeAspect="1"/>
           </p:cNvPicPr>
           <p:nvPr/>
         </p:nvPicPr>
         <p:blipFill>
-          <a:blip r:embed="rId2"/>
+          <a:blip r:embed="rId4"/>
           <a:stretch>
             <a:fillRect/>
           </a:stretch>
@@ -5577,7 +5417,7 @@
           <a:bodyPr wrap="square" lIns="0" tIns="0" rIns="0" bIns="0" rtlCol="0" anchor="ctr"/>
           <a:lstStyle/>
           <a:p>
-            <a:pPr indent="0" marL="0">
+            <a:pPr marL="0" indent="0">
               <a:buNone/>
             </a:pPr>
             <a:r>
@@ -5616,7 +5456,7 @@
           <a:bodyPr wrap="square" lIns="0" tIns="0" rIns="0" bIns="0" rtlCol="0" anchor="ctr"/>
           <a:lstStyle/>
           <a:p>
-            <a:pPr indent="0" marL="0">
+            <a:pPr marL="0" indent="0">
               <a:lnSpc>
                 <a:spcPct val="104000"/>
               </a:lnSpc>
@@ -5663,13 +5503,20 @@
             <a:prstDash val="solid"/>
           </a:ln>
           <a:effectLst>
-            <a:outerShdw sx="100000" sy="100000" kx="0" ky="0" algn="bl" rotWithShape="0" blurRad="88900" dist="38100" dir="5400000">
+            <a:outerShdw blurRad="88900" dist="38100" dir="5400000" algn="bl" rotWithShape="0">
               <a:srgbClr val="000000">
                 <a:alpha val="12000"/>
               </a:srgbClr>
             </a:outerShdw>
           </a:effectLst>
         </p:spPr>
+        <p:txBody>
+          <a:bodyPr/>
+          <a:lstStyle/>
+          <a:p>
+            <a:endParaRPr lang="it-IT"/>
+          </a:p>
+        </p:txBody>
       </p:sp>
       <p:sp>
         <p:nvSpPr>
@@ -5690,24 +5537,31 @@
           </a:solidFill>
           <a:ln/>
           <a:effectLst>
-            <a:outerShdw sx="100000" sy="100000" kx="0" ky="0" algn="bl" rotWithShape="0" blurRad="88900" dist="38100" dir="5400000">
+            <a:outerShdw blurRad="88900" dist="38100" dir="5400000" algn="bl" rotWithShape="0">
               <a:srgbClr val="000000">
                 <a:alpha val="12000"/>
               </a:srgbClr>
             </a:outerShdw>
           </a:effectLst>
         </p:spPr>
+        <p:txBody>
+          <a:bodyPr/>
+          <a:lstStyle/>
+          <a:p>
+            <a:endParaRPr lang="it-IT"/>
+          </a:p>
+        </p:txBody>
       </p:sp>
       <p:pic>
         <p:nvPicPr>
-          <p:cNvPr id="18" name="Image 2" descr="preencoded.png">    </p:cNvPr>
+          <p:cNvPr id="18" name="Image 2" descr="preencoded.png"/>
           <p:cNvPicPr>
             <a:picLocks noChangeAspect="1"/>
           </p:cNvPicPr>
           <p:nvPr/>
         </p:nvPicPr>
         <p:blipFill>
-          <a:blip r:embed="rId3"/>
+          <a:blip r:embed="rId5"/>
           <a:stretch>
             <a:fillRect/>
           </a:stretch>
@@ -5743,7 +5597,7 @@
           <a:bodyPr wrap="square" lIns="0" tIns="0" rIns="0" bIns="0" rtlCol="0" anchor="ctr"/>
           <a:lstStyle/>
           <a:p>
-            <a:pPr indent="0" marL="0">
+            <a:pPr marL="0" indent="0">
               <a:buNone/>
             </a:pPr>
             <a:r>
@@ -5782,7 +5636,7 @@
           <a:bodyPr wrap="square" lIns="0" tIns="0" rIns="0" bIns="0" rtlCol="0" anchor="ctr"/>
           <a:lstStyle/>
           <a:p>
-            <a:pPr indent="0" marL="0">
+            <a:pPr marL="0" indent="0">
               <a:lnSpc>
                 <a:spcPct val="104000"/>
               </a:lnSpc>
@@ -5819,6 +5673,7 @@
         <a:solidFill>
           <a:srgbClr val="F3F2EE"/>
         </a:solidFill>
+        <a:effectLst/>
       </p:bgPr>
     </p:bg>
     <p:spTree>
@@ -5856,11 +5711,11 @@
           <a:bodyPr wrap="square" lIns="0" tIns="0" rIns="0" bIns="0" rtlCol="0" anchor="ctr"/>
           <a:lstStyle/>
           <a:p>
-            <a:pPr indent="0" marL="0">
-              <a:buNone/>
-            </a:pPr>
-            <a:r>
-              <a:rPr lang="en-US" sz="1100" b="1" spc="200" kern="0" dirty="0">
+            <a:pPr marL="0" indent="0">
+              <a:buNone/>
+            </a:pPr>
+            <a:r>
+              <a:rPr lang="en-US" sz="1100" b="1" kern="0" spc="200" dirty="0">
                 <a:solidFill>
                   <a:srgbClr val="2F6E80"/>
                 </a:solidFill>
@@ -5895,7 +5750,7 @@
           <a:bodyPr wrap="square" lIns="0" tIns="0" rIns="0" bIns="0" rtlCol="0" anchor="ctr"/>
           <a:lstStyle/>
           <a:p>
-            <a:pPr indent="0" marL="0">
+            <a:pPr marL="0" indent="0">
               <a:buNone/>
             </a:pPr>
             <a:r>
@@ -5939,13 +5794,20 @@
             <a:prstDash val="solid"/>
           </a:ln>
           <a:effectLst>
-            <a:outerShdw sx="100000" sy="100000" kx="0" ky="0" algn="bl" rotWithShape="0" blurRad="88900" dist="38100" dir="5400000">
+            <a:outerShdw blurRad="88900" dist="38100" dir="5400000" algn="bl" rotWithShape="0">
               <a:srgbClr val="000000">
                 <a:alpha val="12000"/>
               </a:srgbClr>
             </a:outerShdw>
           </a:effectLst>
         </p:spPr>
+        <p:txBody>
+          <a:bodyPr/>
+          <a:lstStyle/>
+          <a:p>
+            <a:endParaRPr lang="it-IT"/>
+          </a:p>
+        </p:txBody>
       </p:sp>
       <p:sp>
         <p:nvSpPr>
@@ -5966,24 +5828,31 @@
           </a:solidFill>
           <a:ln/>
           <a:effectLst>
-            <a:outerShdw sx="100000" sy="100000" kx="0" ky="0" algn="bl" rotWithShape="0" blurRad="88900" dist="38100" dir="5400000">
+            <a:outerShdw blurRad="88900" dist="38100" dir="5400000" algn="bl" rotWithShape="0">
               <a:srgbClr val="000000">
                 <a:alpha val="12000"/>
               </a:srgbClr>
             </a:outerShdw>
           </a:effectLst>
         </p:spPr>
+        <p:txBody>
+          <a:bodyPr/>
+          <a:lstStyle/>
+          <a:p>
+            <a:endParaRPr lang="it-IT"/>
+          </a:p>
+        </p:txBody>
       </p:sp>
       <p:pic>
         <p:nvPicPr>
-          <p:cNvPr id="6" name="Image 0" descr="preencoded.png">    </p:cNvPr>
+          <p:cNvPr id="6" name="Image 0" descr="preencoded.png"/>
           <p:cNvPicPr>
             <a:picLocks noChangeAspect="1"/>
           </p:cNvPicPr>
           <p:nvPr/>
         </p:nvPicPr>
         <p:blipFill>
-          <a:blip r:embed="rId1"/>
+          <a:blip r:embed="rId3"/>
           <a:stretch>
             <a:fillRect/>
           </a:stretch>
@@ -6019,7 +5888,7 @@
           <a:bodyPr wrap="square" lIns="0" tIns="0" rIns="0" bIns="0" rtlCol="0" anchor="ctr"/>
           <a:lstStyle/>
           <a:p>
-            <a:pPr indent="0" marL="0">
+            <a:pPr marL="0" indent="0">
               <a:buNone/>
             </a:pPr>
             <a:r>
@@ -6056,6 +5925,13 @@
           </a:solidFill>
           <a:ln/>
         </p:spPr>
+        <p:txBody>
+          <a:bodyPr/>
+          <a:lstStyle/>
+          <a:p>
+            <a:endParaRPr lang="it-IT"/>
+          </a:p>
+        </p:txBody>
       </p:sp>
       <p:sp>
         <p:nvSpPr>
@@ -6078,7 +5954,7 @@
           <a:bodyPr wrap="square" lIns="0" tIns="0" rIns="0" bIns="0" rtlCol="0" anchor="ctr"/>
           <a:lstStyle/>
           <a:p>
-            <a:pPr indent="0" marL="0">
+            <a:pPr marL="0" indent="0">
               <a:lnSpc>
                 <a:spcPct val="102000"/>
               </a:lnSpc>
@@ -6118,6 +5994,13 @@
           </a:solidFill>
           <a:ln/>
         </p:spPr>
+        <p:txBody>
+          <a:bodyPr/>
+          <a:lstStyle/>
+          <a:p>
+            <a:endParaRPr lang="it-IT"/>
+          </a:p>
+        </p:txBody>
       </p:sp>
       <p:sp>
         <p:nvSpPr>
@@ -6140,7 +6023,7 @@
           <a:bodyPr wrap="square" lIns="0" tIns="0" rIns="0" bIns="0" rtlCol="0" anchor="ctr"/>
           <a:lstStyle/>
           <a:p>
-            <a:pPr indent="0" marL="0">
+            <a:pPr marL="0" indent="0">
               <a:lnSpc>
                 <a:spcPct val="102000"/>
               </a:lnSpc>
@@ -6180,6 +6063,13 @@
           </a:solidFill>
           <a:ln/>
         </p:spPr>
+        <p:txBody>
+          <a:bodyPr/>
+          <a:lstStyle/>
+          <a:p>
+            <a:endParaRPr lang="it-IT"/>
+          </a:p>
+        </p:txBody>
       </p:sp>
       <p:sp>
         <p:nvSpPr>
@@ -6202,7 +6092,7 @@
           <a:bodyPr wrap="square" lIns="0" tIns="0" rIns="0" bIns="0" rtlCol="0" anchor="ctr"/>
           <a:lstStyle/>
           <a:p>
-            <a:pPr indent="0" marL="0">
+            <a:pPr marL="0" indent="0">
               <a:lnSpc>
                 <a:spcPct val="102000"/>
               </a:lnSpc>
@@ -6249,13 +6139,20 @@
             <a:prstDash val="solid"/>
           </a:ln>
           <a:effectLst>
-            <a:outerShdw sx="100000" sy="100000" kx="0" ky="0" algn="bl" rotWithShape="0" blurRad="88900" dist="38100" dir="5400000">
+            <a:outerShdw blurRad="88900" dist="38100" dir="5400000" algn="bl" rotWithShape="0">
               <a:srgbClr val="000000">
                 <a:alpha val="12000"/>
               </a:srgbClr>
             </a:outerShdw>
           </a:effectLst>
         </p:spPr>
+        <p:txBody>
+          <a:bodyPr/>
+          <a:lstStyle/>
+          <a:p>
+            <a:endParaRPr lang="it-IT"/>
+          </a:p>
+        </p:txBody>
       </p:sp>
       <p:sp>
         <p:nvSpPr>
@@ -6276,24 +6173,31 @@
           </a:solidFill>
           <a:ln/>
           <a:effectLst>
-            <a:outerShdw sx="100000" sy="100000" kx="0" ky="0" algn="bl" rotWithShape="0" blurRad="88900" dist="38100" dir="5400000">
+            <a:outerShdw blurRad="88900" dist="38100" dir="5400000" algn="bl" rotWithShape="0">
               <a:srgbClr val="000000">
                 <a:alpha val="12000"/>
               </a:srgbClr>
             </a:outerShdw>
           </a:effectLst>
         </p:spPr>
+        <p:txBody>
+          <a:bodyPr/>
+          <a:lstStyle/>
+          <a:p>
+            <a:endParaRPr lang="it-IT"/>
+          </a:p>
+        </p:txBody>
       </p:sp>
       <p:pic>
         <p:nvPicPr>
-          <p:cNvPr id="16" name="Image 1" descr="preencoded.png">    </p:cNvPr>
+          <p:cNvPr id="16" name="Image 1" descr="preencoded.png"/>
           <p:cNvPicPr>
             <a:picLocks noChangeAspect="1"/>
           </p:cNvPicPr>
           <p:nvPr/>
         </p:nvPicPr>
         <p:blipFill>
-          <a:blip r:embed="rId2"/>
+          <a:blip r:embed="rId4"/>
           <a:stretch>
             <a:fillRect/>
           </a:stretch>
@@ -6329,7 +6233,7 @@
           <a:bodyPr wrap="square" lIns="0" tIns="0" rIns="0" bIns="0" rtlCol="0" anchor="ctr"/>
           <a:lstStyle/>
           <a:p>
-            <a:pPr indent="0" marL="0">
+            <a:pPr marL="0" indent="0">
               <a:buNone/>
             </a:pPr>
             <a:r>
@@ -6366,6 +6270,13 @@
           </a:solidFill>
           <a:ln/>
         </p:spPr>
+        <p:txBody>
+          <a:bodyPr/>
+          <a:lstStyle/>
+          <a:p>
+            <a:endParaRPr lang="it-IT"/>
+          </a:p>
+        </p:txBody>
       </p:sp>
       <p:sp>
         <p:nvSpPr>
@@ -6388,7 +6299,7 @@
           <a:bodyPr wrap="square" lIns="0" tIns="0" rIns="0" bIns="0" rtlCol="0" anchor="ctr"/>
           <a:lstStyle/>
           <a:p>
-            <a:pPr indent="0" marL="0">
+            <a:pPr marL="0" indent="0">
               <a:lnSpc>
                 <a:spcPct val="102000"/>
               </a:lnSpc>
@@ -6428,6 +6339,13 @@
           </a:solidFill>
           <a:ln/>
         </p:spPr>
+        <p:txBody>
+          <a:bodyPr/>
+          <a:lstStyle/>
+          <a:p>
+            <a:endParaRPr lang="it-IT"/>
+          </a:p>
+        </p:txBody>
       </p:sp>
       <p:sp>
         <p:nvSpPr>
@@ -6450,7 +6368,7 @@
           <a:bodyPr wrap="square" lIns="0" tIns="0" rIns="0" bIns="0" rtlCol="0" anchor="ctr"/>
           <a:lstStyle/>
           <a:p>
-            <a:pPr indent="0" marL="0">
+            <a:pPr marL="0" indent="0">
               <a:lnSpc>
                 <a:spcPct val="102000"/>
               </a:lnSpc>
@@ -6490,6 +6408,13 @@
           </a:solidFill>
           <a:ln/>
         </p:spPr>
+        <p:txBody>
+          <a:bodyPr/>
+          <a:lstStyle/>
+          <a:p>
+            <a:endParaRPr lang="it-IT"/>
+          </a:p>
+        </p:txBody>
       </p:sp>
       <p:sp>
         <p:nvSpPr>
@@ -6512,7 +6437,7 @@
           <a:bodyPr wrap="square" lIns="0" tIns="0" rIns="0" bIns="0" rtlCol="0" anchor="ctr"/>
           <a:lstStyle/>
           <a:p>
-            <a:pPr indent="0" marL="0">
+            <a:pPr marL="0" indent="0">
               <a:lnSpc>
                 <a:spcPct val="102000"/>
               </a:lnSpc>
@@ -6834,4 +6759,319 @@
     </a:ext>
   </a:extLst>
 </a:theme>
+</file>
+
+<file path=ppt/theme/theme2.xml><?xml version="1.0" encoding="utf-8"?>
+<a:theme xmlns:a="http://schemas.openxmlformats.org/drawingml/2006/main" name="Tema di Office">
+  <a:themeElements>
+    <a:clrScheme name="Office">
+      <a:dk1>
+        <a:sysClr val="windowText" lastClr="000000"/>
+      </a:dk1>
+      <a:lt1>
+        <a:sysClr val="window" lastClr="FFFFFF"/>
+      </a:lt1>
+      <a:dk2>
+        <a:srgbClr val="0E2841"/>
+      </a:dk2>
+      <a:lt2>
+        <a:srgbClr val="E8E8E8"/>
+      </a:lt2>
+      <a:accent1>
+        <a:srgbClr val="156082"/>
+      </a:accent1>
+      <a:accent2>
+        <a:srgbClr val="E97132"/>
+      </a:accent2>
+      <a:accent3>
+        <a:srgbClr val="196B24"/>
+      </a:accent3>
+      <a:accent4>
+        <a:srgbClr val="0F9ED5"/>
+      </a:accent4>
+      <a:accent5>
+        <a:srgbClr val="A02B93"/>
+      </a:accent5>
+      <a:accent6>
+        <a:srgbClr val="4EA72E"/>
+      </a:accent6>
+      <a:hlink>
+        <a:srgbClr val="467886"/>
+      </a:hlink>
+      <a:folHlink>
+        <a:srgbClr val="96607D"/>
+      </a:folHlink>
+    </a:clrScheme>
+    <a:fontScheme name="Office">
+      <a:majorFont>
+        <a:latin typeface="Aptos Display" panose="02110004020202020204"/>
+        <a:ea typeface=""/>
+        <a:cs typeface=""/>
+        <a:font script="Jpan" typeface="游ゴシック Light"/>
+        <a:font script="Hang" typeface="맑은 고딕"/>
+        <a:font script="Hans" typeface="等线 Light"/>
+        <a:font script="Hant" typeface="新細明體"/>
+        <a:font script="Arab" typeface="Times New Roman"/>
+        <a:font script="Hebr" typeface="Times New Roman"/>
+        <a:font script="Thai" typeface="Angsana New"/>
+        <a:font script="Ethi" typeface="Nyala"/>
+        <a:font script="Beng" typeface="Vrinda"/>
+        <a:font script="Gujr" typeface="Shruti"/>
+        <a:font script="Khmr" typeface="MoolBoran"/>
+        <a:font script="Knda" typeface="Tunga"/>
+        <a:font script="Guru" typeface="Raavi"/>
+        <a:font script="Cans" typeface="Euphemia"/>
+        <a:font script="Cher" typeface="Plantagenet Cherokee"/>
+        <a:font script="Yiii" typeface="Microsoft Yi Baiti"/>
+        <a:font script="Tibt" typeface="Microsoft Himalaya"/>
+        <a:font script="Thaa" typeface="MV Boli"/>
+        <a:font script="Deva" typeface="Mangal"/>
+        <a:font script="Telu" typeface="Gautami"/>
+        <a:font script="Taml" typeface="Latha"/>
+        <a:font script="Syrc" typeface="Estrangelo Edessa"/>
+        <a:font script="Orya" typeface="Kalinga"/>
+        <a:font script="Mlym" typeface="Kartika"/>
+        <a:font script="Laoo" typeface="DokChampa"/>
+        <a:font script="Sinh" typeface="Iskoola Pota"/>
+        <a:font script="Mong" typeface="Mongolian Baiti"/>
+        <a:font script="Viet" typeface="Times New Roman"/>
+        <a:font script="Uigh" typeface="Microsoft Uighur"/>
+        <a:font script="Geor" typeface="Sylfaen"/>
+        <a:font script="Armn" typeface="Arial"/>
+        <a:font script="Bugi" typeface="Leelawadee UI"/>
+        <a:font script="Bopo" typeface="Microsoft JhengHei"/>
+        <a:font script="Java" typeface="Javanese Text"/>
+        <a:font script="Lisu" typeface="Segoe UI"/>
+        <a:font script="Mymr" typeface="Myanmar Text"/>
+        <a:font script="Nkoo" typeface="Ebrima"/>
+        <a:font script="Olck" typeface="Nirmala UI"/>
+        <a:font script="Osma" typeface="Ebrima"/>
+        <a:font script="Phag" typeface="Phagspa"/>
+        <a:font script="Syrn" typeface="Estrangelo Edessa"/>
+        <a:font script="Syrj" typeface="Estrangelo Edessa"/>
+        <a:font script="Syre" typeface="Estrangelo Edessa"/>
+        <a:font script="Sora" typeface="Nirmala UI"/>
+        <a:font script="Tale" typeface="Microsoft Tai Le"/>
+        <a:font script="Talu" typeface="Microsoft New Tai Lue"/>
+        <a:font script="Tfng" typeface="Ebrima"/>
+      </a:majorFont>
+      <a:minorFont>
+        <a:latin typeface="Aptos" panose="02110004020202020204"/>
+        <a:ea typeface=""/>
+        <a:cs typeface=""/>
+        <a:font script="Jpan" typeface="游ゴシック"/>
+        <a:font script="Hang" typeface="맑은 고딕"/>
+        <a:font script="Hans" typeface="等线"/>
+        <a:font script="Hant" typeface="新細明體"/>
+        <a:font script="Arab" typeface="Arial"/>
+        <a:font script="Hebr" typeface="Arial"/>
+        <a:font script="Thai" typeface="Cordia New"/>
+        <a:font script="Ethi" typeface="Nyala"/>
+        <a:font script="Beng" typeface="Vrinda"/>
+        <a:font script="Gujr" typeface="Shruti"/>
+        <a:font script="Khmr" typeface="DaunPenh"/>
+        <a:font script="Knda" typeface="Tunga"/>
+        <a:font script="Guru" typeface="Raavi"/>
+        <a:font script="Cans" typeface="Euphemia"/>
+        <a:font script="Cher" typeface="Plantagenet Cherokee"/>
+        <a:font script="Yiii" typeface="Microsoft Yi Baiti"/>
+        <a:font script="Tibt" typeface="Microsoft Himalaya"/>
+        <a:font script="Thaa" typeface="MV Boli"/>
+        <a:font script="Deva" typeface="Mangal"/>
+        <a:font script="Telu" typeface="Gautami"/>
+        <a:font script="Taml" typeface="Latha"/>
+        <a:font script="Syrc" typeface="Estrangelo Edessa"/>
+        <a:font script="Orya" typeface="Kalinga"/>
+        <a:font script="Mlym" typeface="Kartika"/>
+        <a:font script="Laoo" typeface="DokChampa"/>
+        <a:font script="Sinh" typeface="Iskoola Pota"/>
+        <a:font script="Mong" typeface="Mongolian Baiti"/>
+        <a:font script="Viet" typeface="Arial"/>
+        <a:font script="Uigh" typeface="Microsoft Uighur"/>
+        <a:font script="Geor" typeface="Sylfaen"/>
+        <a:font script="Armn" typeface="Arial"/>
+        <a:font script="Bugi" typeface="Leelawadee UI"/>
+        <a:font script="Bopo" typeface="Microsoft JhengHei"/>
+        <a:font script="Java" typeface="Javanese Text"/>
+        <a:font script="Lisu" typeface="Segoe UI"/>
+        <a:font script="Mymr" typeface="Myanmar Text"/>
+        <a:font script="Nkoo" typeface="Ebrima"/>
+        <a:font script="Olck" typeface="Nirmala UI"/>
+        <a:font script="Osma" typeface="Ebrima"/>
+        <a:font script="Phag" typeface="Phagspa"/>
+        <a:font script="Syrn" typeface="Estrangelo Edessa"/>
+        <a:font script="Syrj" typeface="Estrangelo Edessa"/>
+        <a:font script="Syre" typeface="Estrangelo Edessa"/>
+        <a:font script="Sora" typeface="Nirmala UI"/>
+        <a:font script="Tale" typeface="Microsoft Tai Le"/>
+        <a:font script="Talu" typeface="Microsoft New Tai Lue"/>
+        <a:font script="Tfng" typeface="Ebrima"/>
+      </a:minorFont>
+    </a:fontScheme>
+    <a:fmtScheme name="Office">
+      <a:fillStyleLst>
+        <a:solidFill>
+          <a:schemeClr val="phClr"/>
+        </a:solidFill>
+        <a:gradFill rotWithShape="1">
+          <a:gsLst>
+            <a:gs pos="0">
+              <a:schemeClr val="phClr">
+                <a:lumMod val="110000"/>
+                <a:satMod val="105000"/>
+                <a:tint val="67000"/>
+              </a:schemeClr>
+            </a:gs>
+            <a:gs pos="50000">
+              <a:schemeClr val="phClr">
+                <a:lumMod val="105000"/>
+                <a:satMod val="103000"/>
+                <a:tint val="73000"/>
+              </a:schemeClr>
+            </a:gs>
+            <a:gs pos="100000">
+              <a:schemeClr val="phClr">
+                <a:lumMod val="105000"/>
+                <a:satMod val="109000"/>
+                <a:tint val="81000"/>
+              </a:schemeClr>
+            </a:gs>
+          </a:gsLst>
+          <a:lin ang="5400000" scaled="0"/>
+        </a:gradFill>
+        <a:gradFill rotWithShape="1">
+          <a:gsLst>
+            <a:gs pos="0">
+              <a:schemeClr val="phClr">
+                <a:satMod val="103000"/>
+                <a:lumMod val="102000"/>
+                <a:tint val="94000"/>
+              </a:schemeClr>
+            </a:gs>
+            <a:gs pos="50000">
+              <a:schemeClr val="phClr">
+                <a:satMod val="110000"/>
+                <a:lumMod val="100000"/>
+                <a:shade val="100000"/>
+              </a:schemeClr>
+            </a:gs>
+            <a:gs pos="100000">
+              <a:schemeClr val="phClr">
+                <a:lumMod val="99000"/>
+                <a:satMod val="120000"/>
+                <a:shade val="78000"/>
+              </a:schemeClr>
+            </a:gs>
+          </a:gsLst>
+          <a:lin ang="5400000" scaled="0"/>
+        </a:gradFill>
+      </a:fillStyleLst>
+      <a:lnStyleLst>
+        <a:ln w="12700" cap="flat" cmpd="sng" algn="ctr">
+          <a:solidFill>
+            <a:schemeClr val="phClr"/>
+          </a:solidFill>
+          <a:prstDash val="solid"/>
+          <a:miter lim="800000"/>
+        </a:ln>
+        <a:ln w="19050" cap="flat" cmpd="sng" algn="ctr">
+          <a:solidFill>
+            <a:schemeClr val="phClr"/>
+          </a:solidFill>
+          <a:prstDash val="solid"/>
+          <a:miter lim="800000"/>
+        </a:ln>
+        <a:ln w="25400" cap="flat" cmpd="sng" algn="ctr">
+          <a:solidFill>
+            <a:schemeClr val="phClr"/>
+          </a:solidFill>
+          <a:prstDash val="solid"/>
+          <a:miter lim="800000"/>
+        </a:ln>
+      </a:lnStyleLst>
+      <a:effectStyleLst>
+        <a:effectStyle>
+          <a:effectLst/>
+        </a:effectStyle>
+        <a:effectStyle>
+          <a:effectLst/>
+        </a:effectStyle>
+        <a:effectStyle>
+          <a:effectLst>
+            <a:outerShdw blurRad="57150" dist="19050" dir="5400000" algn="ctr" rotWithShape="0">
+              <a:srgbClr val="000000">
+                <a:alpha val="63000"/>
+              </a:srgbClr>
+            </a:outerShdw>
+          </a:effectLst>
+        </a:effectStyle>
+      </a:effectStyleLst>
+      <a:bgFillStyleLst>
+        <a:solidFill>
+          <a:schemeClr val="phClr"/>
+        </a:solidFill>
+        <a:solidFill>
+          <a:schemeClr val="phClr">
+            <a:tint val="95000"/>
+            <a:satMod val="170000"/>
+          </a:schemeClr>
+        </a:solidFill>
+        <a:gradFill rotWithShape="1">
+          <a:gsLst>
+            <a:gs pos="0">
+              <a:schemeClr val="phClr">
+                <a:tint val="93000"/>
+                <a:satMod val="150000"/>
+                <a:shade val="98000"/>
+                <a:lumMod val="102000"/>
+              </a:schemeClr>
+            </a:gs>
+            <a:gs pos="50000">
+              <a:schemeClr val="phClr">
+                <a:tint val="98000"/>
+                <a:satMod val="130000"/>
+                <a:shade val="90000"/>
+                <a:lumMod val="103000"/>
+              </a:schemeClr>
+            </a:gs>
+            <a:gs pos="100000">
+              <a:schemeClr val="phClr">
+                <a:shade val="63000"/>
+                <a:satMod val="120000"/>
+              </a:schemeClr>
+            </a:gs>
+          </a:gsLst>
+          <a:lin ang="5400000" scaled="0"/>
+        </a:gradFill>
+      </a:bgFillStyleLst>
+    </a:fmtScheme>
+  </a:themeElements>
+  <a:objectDefaults>
+    <a:lnDef>
+      <a:spPr/>
+      <a:bodyPr/>
+      <a:lstStyle/>
+      <a:style>
+        <a:lnRef idx="2">
+          <a:schemeClr val="accent1"/>
+        </a:lnRef>
+        <a:fillRef idx="0">
+          <a:schemeClr val="accent1"/>
+        </a:fillRef>
+        <a:effectRef idx="1">
+          <a:schemeClr val="accent1"/>
+        </a:effectRef>
+        <a:fontRef idx="minor">
+          <a:schemeClr val="tx1"/>
+        </a:fontRef>
+      </a:style>
+    </a:lnDef>
+  </a:objectDefaults>
+  <a:extraClrSchemeLst/>
+  <a:extLst>
+    <a:ext uri="{05A4C25C-085E-4340-85A3-A5531E510DB2}">
+      <thm15:themeFamily xmlns:thm15="http://schemas.microsoft.com/office/thememl/2012/main" name="Office Theme" id="{2E142A2C-CD16-42D6-873A-C26D2A0506FA}" vid="{1BDDFF52-6CD6-40A5-AB3C-68EB2F1E4D0A}"/>
+    </a:ext>
+  </a:extLst>
+</a:theme>
 </file>